--- a/reports/slides.pptx
+++ b/reports/slides.pptx
@@ -3094,6 +3094,14 @@
 <file path=ppt/slides/slide1.xml><?xml version="1.0" encoding="utf-8"?>
 <p:sld xmlns:a="http://schemas.openxmlformats.org/drawingml/2006/main" xmlns:p="http://schemas.openxmlformats.org/presentationml/2006/main" xmlns:r="http://schemas.openxmlformats.org/officeDocument/2006/relationships">
   <p:cSld>
+    <p:bg>
+      <p:bgPr>
+        <a:solidFill>
+          <a:srgbClr val="003B70"/>
+        </a:solidFill>
+        <a:effectLst/>
+      </p:bgPr>
+    </p:bg>
     <p:spTree>
       <p:nvGrpSpPr>
         <p:cNvPr id="1" name=""/>
@@ -3103,20 +3111,120 @@
       <p:grpSpPr/>
       <p:sp>
         <p:nvSpPr>
-          <p:cNvPr id="2" name="Title 1"/>
-          <p:cNvSpPr>
-            <a:spLocks noGrp="1"/>
-          </p:cNvSpPr>
-          <p:nvPr>
-            <p:ph type="ctrTitle"/>
-          </p:nvPr>
-        </p:nvSpPr>
-        <p:spPr/>
-        <p:txBody>
-          <a:bodyPr/>
-          <a:lstStyle/>
-          <a:p>
-            <a:r>
+          <p:cNvPr id="2" name="Rectangle 1"/>
+          <p:cNvSpPr/>
+          <p:nvPr/>
+        </p:nvSpPr>
+        <p:spPr>
+          <a:xfrm>
+            <a:off x="0" y="2331720"/>
+            <a:ext cx="12191695" cy="64008"/>
+          </a:xfrm>
+          <a:prstGeom prst="rect">
+            <a:avLst/>
+          </a:prstGeom>
+          <a:solidFill>
+            <a:srgbClr val="C5A059"/>
+          </a:solidFill>
+          <a:ln>
+            <a:noFill/>
+          </a:ln>
+          <a:effectLst/>
+        </p:spPr>
+        <p:style>
+          <a:lnRef idx="1">
+            <a:schemeClr val="accent1"/>
+          </a:lnRef>
+          <a:fillRef idx="3">
+            <a:schemeClr val="accent1"/>
+          </a:fillRef>
+          <a:effectRef idx="2">
+            <a:schemeClr val="accent1"/>
+          </a:effectRef>
+          <a:fontRef idx="minor">
+            <a:schemeClr val="lt1"/>
+          </a:fontRef>
+        </p:style>
+        <p:txBody>
+          <a:bodyPr rtlCol="0" anchor="ctr"/>
+          <a:lstStyle/>
+          <a:p>
+            <a:pPr algn="ctr"/>
+          </a:p>
+        </p:txBody>
+      </p:sp>
+      <p:sp>
+        <p:nvSpPr>
+          <p:cNvPr id="3" name="Rectangle 2"/>
+          <p:cNvSpPr/>
+          <p:nvPr/>
+        </p:nvSpPr>
+        <p:spPr>
+          <a:xfrm>
+            <a:off x="0" y="2395728"/>
+            <a:ext cx="12191695" cy="36576"/>
+          </a:xfrm>
+          <a:prstGeom prst="rect">
+            <a:avLst/>
+          </a:prstGeom>
+          <a:solidFill>
+            <a:srgbClr val="6CACE4"/>
+          </a:solidFill>
+          <a:ln>
+            <a:noFill/>
+          </a:ln>
+          <a:effectLst/>
+        </p:spPr>
+        <p:style>
+          <a:lnRef idx="1">
+            <a:schemeClr val="accent1"/>
+          </a:lnRef>
+          <a:fillRef idx="3">
+            <a:schemeClr val="accent1"/>
+          </a:fillRef>
+          <a:effectRef idx="2">
+            <a:schemeClr val="accent1"/>
+          </a:effectRef>
+          <a:fontRef idx="minor">
+            <a:schemeClr val="lt1"/>
+          </a:fontRef>
+        </p:style>
+        <p:txBody>
+          <a:bodyPr rtlCol="0" anchor="ctr"/>
+          <a:lstStyle/>
+          <a:p>
+            <a:pPr algn="ctr"/>
+          </a:p>
+        </p:txBody>
+      </p:sp>
+      <p:sp>
+        <p:nvSpPr>
+          <p:cNvPr id="4" name="TextBox 3"/>
+          <p:cNvSpPr txBox="1"/>
+          <p:nvPr/>
+        </p:nvSpPr>
+        <p:spPr>
+          <a:xfrm>
+            <a:off x="731520" y="822960"/>
+            <a:ext cx="10698480" cy="1463040"/>
+          </a:xfrm>
+          <a:prstGeom prst="rect">
+            <a:avLst/>
+          </a:prstGeom>
+          <a:noFill/>
+        </p:spPr>
+        <p:txBody>
+          <a:bodyPr wrap="square" anchor="b">
+            <a:spAutoFit/>
+          </a:bodyPr>
+          <a:lstStyle/>
+          <a:p>
+            <a:r>
+              <a:rPr sz="4000" b="1">
+                <a:solidFill>
+                  <a:srgbClr val="FFFFFF"/>
+                </a:solidFill>
+              </a:rPr>
               <a:t>Predicting 30-Day Heart Failure Readmission Risk</a:t>
             </a:r>
           </a:p>
@@ -3124,26 +3232,131 @@
       </p:sp>
       <p:sp>
         <p:nvSpPr>
-          <p:cNvPr id="3" name="Subtitle 2"/>
-          <p:cNvSpPr>
-            <a:spLocks noGrp="1"/>
-          </p:cNvSpPr>
-          <p:nvPr>
-            <p:ph type="subTitle" idx="1"/>
-          </p:nvPr>
-        </p:nvSpPr>
-        <p:spPr/>
-        <p:txBody>
-          <a:bodyPr/>
-          <a:lstStyle/>
-          <a:p>
-            <a:r>
-              <a:t>AAI-500 Final Project · Group 4 — Ian Schmitt, Keana Gindlesperger, Guna Pasupathy</a:t>
-            </a:r>
-          </a:p>
-          <a:p>
-            <a:r>
-              <a:t>Shiley-Marcos School of Engineering, University of San Diego</a:t>
+          <p:cNvPr id="5" name="TextBox 4"/>
+          <p:cNvSpPr txBox="1"/>
+          <p:nvPr/>
+        </p:nvSpPr>
+        <p:spPr>
+          <a:xfrm>
+            <a:off x="731520" y="2651760"/>
+            <a:ext cx="10698480" cy="2743200"/>
+          </a:xfrm>
+          <a:prstGeom prst="rect">
+            <a:avLst/>
+          </a:prstGeom>
+          <a:noFill/>
+        </p:spPr>
+        <p:txBody>
+          <a:bodyPr wrap="square" anchor="t">
+            <a:spAutoFit/>
+          </a:bodyPr>
+          <a:lstStyle/>
+          <a:p>
+            <a:pPr>
+              <a:spcAft>
+                <a:spcPts val="600"/>
+              </a:spcAft>
+            </a:pPr>
+            <a:r>
+              <a:rPr sz="2000" b="1">
+                <a:solidFill>
+                  <a:srgbClr val="FFFFFF"/>
+                </a:solidFill>
+              </a:rPr>
+              <a:t>AAI-500 · Probability and Statistics for Artificial Intelligence</a:t>
+            </a:r>
+          </a:p>
+          <a:p>
+            <a:pPr>
+              <a:spcAft>
+                <a:spcPts val="600"/>
+              </a:spcAft>
+            </a:pPr>
+            <a:r>
+              <a:rPr sz="1800" b="0">
+                <a:solidFill>
+                  <a:srgbClr val="6CACE4"/>
+                </a:solidFill>
+              </a:rPr>
+              <a:t>Professor Dallin Munger</a:t>
+            </a:r>
+          </a:p>
+          <a:p>
+            <a:pPr>
+              <a:spcAft>
+                <a:spcPts val="600"/>
+              </a:spcAft>
+            </a:pPr>
+            <a:r>
+              <a:rPr sz="800" b="0">
+                <a:solidFill>
+                  <a:srgbClr val="FFFFFF"/>
+                </a:solidFill>
+              </a:rPr>
+              <a:t/>
+            </a:r>
+          </a:p>
+          <a:p>
+            <a:pPr>
+              <a:spcAft>
+                <a:spcPts val="600"/>
+              </a:spcAft>
+            </a:pPr>
+            <a:r>
+              <a:rPr sz="1800" b="1">
+                <a:solidFill>
+                  <a:srgbClr val="C5A059"/>
+                </a:solidFill>
+              </a:rPr>
+              <a:t>Group 4</a:t>
+            </a:r>
+          </a:p>
+          <a:p>
+            <a:pPr>
+              <a:spcAft>
+                <a:spcPts val="600"/>
+              </a:spcAft>
+            </a:pPr>
+            <a:r>
+              <a:rPr sz="1800" b="0">
+                <a:solidFill>
+                  <a:srgbClr val="FFFFFF"/>
+                </a:solidFill>
+              </a:rPr>
+              <a:t>Ian Schmitt  ·  Keana Gindlesperger  ·  Guna Pasupathy</a:t>
+            </a:r>
+          </a:p>
+        </p:txBody>
+      </p:sp>
+      <p:sp>
+        <p:nvSpPr>
+          <p:cNvPr id="6" name="TextBox 5"/>
+          <p:cNvSpPr txBox="1"/>
+          <p:nvPr/>
+        </p:nvSpPr>
+        <p:spPr>
+          <a:xfrm>
+            <a:off x="731520" y="6126480"/>
+            <a:ext cx="10698480" cy="457200"/>
+          </a:xfrm>
+          <a:prstGeom prst="rect">
+            <a:avLst/>
+          </a:prstGeom>
+          <a:noFill/>
+        </p:spPr>
+        <p:txBody>
+          <a:bodyPr wrap="square" anchor="t">
+            <a:spAutoFit/>
+          </a:bodyPr>
+          <a:lstStyle/>
+          <a:p>
+            <a:r>
+              <a:rPr sz="1200" b="1">
+                <a:solidFill>
+                  <a:srgbClr val="6CACE4"/>
+                </a:solidFill>
+              </a:rPr>
+              <a:t>UNIVERSITY OF SAN DIEGO  |  SHILEY-MARCOS SCHOOL OF ENGINEERING</a:t>
             </a:r>
           </a:p>
         </p:txBody>
@@ -3159,6 +3372,14 @@
 <file path=ppt/slides/slide10.xml><?xml version="1.0" encoding="utf-8"?>
 <p:sld xmlns:a="http://schemas.openxmlformats.org/drawingml/2006/main" xmlns:p="http://schemas.openxmlformats.org/presentationml/2006/main" xmlns:r="http://schemas.openxmlformats.org/officeDocument/2006/relationships">
   <p:cSld>
+    <p:bg>
+      <p:bgPr>
+        <a:solidFill>
+          <a:srgbClr val="FFFFFF"/>
+        </a:solidFill>
+        <a:effectLst/>
+      </p:bgPr>
+    </p:bg>
     <p:spTree>
       <p:nvGrpSpPr>
         <p:cNvPr id="1" name=""/>
@@ -3168,20 +3389,164 @@
       <p:grpSpPr/>
       <p:sp>
         <p:nvSpPr>
-          <p:cNvPr id="2" name="Title 1"/>
-          <p:cNvSpPr>
-            <a:spLocks noGrp="1"/>
-          </p:cNvSpPr>
-          <p:nvPr>
-            <p:ph type="title"/>
-          </p:nvPr>
-        </p:nvSpPr>
-        <p:spPr/>
-        <p:txBody>
-          <a:bodyPr/>
-          <a:lstStyle/>
-          <a:p>
-            <a:r>
+          <p:cNvPr id="2" name="Rectangle 1"/>
+          <p:cNvSpPr/>
+          <p:nvPr/>
+        </p:nvSpPr>
+        <p:spPr>
+          <a:xfrm>
+            <a:off x="0" y="0"/>
+            <a:ext cx="12191695" cy="1051560"/>
+          </a:xfrm>
+          <a:prstGeom prst="rect">
+            <a:avLst/>
+          </a:prstGeom>
+          <a:solidFill>
+            <a:srgbClr val="003B70"/>
+          </a:solidFill>
+          <a:ln>
+            <a:noFill/>
+          </a:ln>
+          <a:effectLst/>
+        </p:spPr>
+        <p:style>
+          <a:lnRef idx="1">
+            <a:schemeClr val="accent1"/>
+          </a:lnRef>
+          <a:fillRef idx="3">
+            <a:schemeClr val="accent1"/>
+          </a:fillRef>
+          <a:effectRef idx="2">
+            <a:schemeClr val="accent1"/>
+          </a:effectRef>
+          <a:fontRef idx="minor">
+            <a:schemeClr val="lt1"/>
+          </a:fontRef>
+        </p:style>
+        <p:txBody>
+          <a:bodyPr rtlCol="0" anchor="ctr"/>
+          <a:lstStyle/>
+          <a:p>
+            <a:pPr algn="ctr"/>
+          </a:p>
+        </p:txBody>
+      </p:sp>
+      <p:sp>
+        <p:nvSpPr>
+          <p:cNvPr id="3" name="Rectangle 2"/>
+          <p:cNvSpPr/>
+          <p:nvPr/>
+        </p:nvSpPr>
+        <p:spPr>
+          <a:xfrm>
+            <a:off x="0" y="1051560"/>
+            <a:ext cx="2926080" cy="82296"/>
+          </a:xfrm>
+          <a:prstGeom prst="rect">
+            <a:avLst/>
+          </a:prstGeom>
+          <a:solidFill>
+            <a:srgbClr val="C5A059"/>
+          </a:solidFill>
+          <a:ln>
+            <a:noFill/>
+          </a:ln>
+          <a:effectLst/>
+        </p:spPr>
+        <p:style>
+          <a:lnRef idx="1">
+            <a:schemeClr val="accent1"/>
+          </a:lnRef>
+          <a:fillRef idx="3">
+            <a:schemeClr val="accent1"/>
+          </a:fillRef>
+          <a:effectRef idx="2">
+            <a:schemeClr val="accent1"/>
+          </a:effectRef>
+          <a:fontRef idx="minor">
+            <a:schemeClr val="lt1"/>
+          </a:fontRef>
+        </p:style>
+        <p:txBody>
+          <a:bodyPr rtlCol="0" anchor="ctr"/>
+          <a:lstStyle/>
+          <a:p>
+            <a:pPr algn="ctr"/>
+          </a:p>
+        </p:txBody>
+      </p:sp>
+      <p:sp>
+        <p:nvSpPr>
+          <p:cNvPr id="4" name="Rectangle 3"/>
+          <p:cNvSpPr/>
+          <p:nvPr/>
+        </p:nvSpPr>
+        <p:spPr>
+          <a:xfrm>
+            <a:off x="2926080" y="1051560"/>
+            <a:ext cx="9265615" cy="82296"/>
+          </a:xfrm>
+          <a:prstGeom prst="rect">
+            <a:avLst/>
+          </a:prstGeom>
+          <a:solidFill>
+            <a:srgbClr val="6CACE4"/>
+          </a:solidFill>
+          <a:ln>
+            <a:noFill/>
+          </a:ln>
+          <a:effectLst/>
+        </p:spPr>
+        <p:style>
+          <a:lnRef idx="1">
+            <a:schemeClr val="accent1"/>
+          </a:lnRef>
+          <a:fillRef idx="3">
+            <a:schemeClr val="accent1"/>
+          </a:fillRef>
+          <a:effectRef idx="2">
+            <a:schemeClr val="accent1"/>
+          </a:effectRef>
+          <a:fontRef idx="minor">
+            <a:schemeClr val="lt1"/>
+          </a:fontRef>
+        </p:style>
+        <p:txBody>
+          <a:bodyPr rtlCol="0" anchor="ctr"/>
+          <a:lstStyle/>
+          <a:p>
+            <a:pPr algn="ctr"/>
+          </a:p>
+        </p:txBody>
+      </p:sp>
+      <p:sp>
+        <p:nvSpPr>
+          <p:cNvPr id="5" name="TextBox 4"/>
+          <p:cNvSpPr txBox="1"/>
+          <p:nvPr/>
+        </p:nvSpPr>
+        <p:spPr>
+          <a:xfrm>
+            <a:off x="502920" y="0"/>
+            <a:ext cx="11185855" cy="1051560"/>
+          </a:xfrm>
+          <a:prstGeom prst="rect">
+            <a:avLst/>
+          </a:prstGeom>
+          <a:noFill/>
+        </p:spPr>
+        <p:txBody>
+          <a:bodyPr wrap="square" anchor="ctr">
+            <a:spAutoFit/>
+          </a:bodyPr>
+          <a:lstStyle/>
+          <a:p>
+            <a:r>
+              <a:rPr sz="2800" b="1">
+                <a:solidFill>
+                  <a:srgbClr val="FFFFFF"/>
+                </a:solidFill>
+              </a:rPr>
               <a:t>Modeling — Logistic Regression (Ch 7)</a:t>
             </a:r>
           </a:p>
@@ -3189,56 +3554,249 @@
       </p:sp>
       <p:sp>
         <p:nvSpPr>
-          <p:cNvPr id="3" name="Content Placeholder 2"/>
-          <p:cNvSpPr>
-            <a:spLocks noGrp="1"/>
-          </p:cNvSpPr>
-          <p:nvPr>
-            <p:ph idx="1"/>
-          </p:nvPr>
-        </p:nvSpPr>
-        <p:spPr/>
-        <p:txBody>
-          <a:bodyPr/>
+          <p:cNvPr id="6" name="TextBox 5"/>
+          <p:cNvSpPr txBox="1"/>
+          <p:nvPr/>
+        </p:nvSpPr>
+        <p:spPr>
+          <a:xfrm>
+            <a:off x="640080" y="1554480"/>
+            <a:ext cx="10972800" cy="4663440"/>
+          </a:xfrm>
+          <a:prstGeom prst="rect">
+            <a:avLst/>
+          </a:prstGeom>
+          <a:noFill/>
+        </p:spPr>
+        <p:txBody>
+          <a:bodyPr wrap="square" anchor="t">
+            <a:spAutoFit/>
+          </a:bodyPr>
           <a:lstStyle/>
           <a:p>
             <a:pPr>
-              <a:defRPr sz="2200"/>
+              <a:spcAft>
+                <a:spcPts val="1000"/>
+              </a:spcAft>
             </a:pPr>
             <a:r>
+              <a:rPr sz="2000">
+                <a:solidFill>
+                  <a:srgbClr val="C5A059"/>
+                </a:solidFill>
+              </a:rPr>
+              <a:t>●  </a:t>
+            </a:r>
+            <a:r>
+              <a:rPr sz="2000" b="1">
+                <a:solidFill>
+                  <a:srgbClr val="003B70"/>
+                </a:solidFill>
+              </a:rPr>
               <a:t>Logistic-regression GLM (statsmodels) — binary response, interpretable odds ratios.</a:t>
             </a:r>
           </a:p>
           <a:p>
             <a:pPr>
-              <a:defRPr sz="2200"/>
+              <a:spcAft>
+                <a:spcPts val="1000"/>
+              </a:spcAft>
             </a:pPr>
             <a:r>
+              <a:rPr sz="2000">
+                <a:solidFill>
+                  <a:srgbClr val="C5A059"/>
+                </a:solidFill>
+              </a:rPr>
+              <a:t>●  </a:t>
+            </a:r>
+            <a:r>
+              <a:rPr sz="2000" b="1">
+                <a:solidFill>
+                  <a:srgbClr val="003B70"/>
+                </a:solidFill>
+              </a:rPr>
               <a:t>Numeric predictors standardized; categoricals as indicator variables.</a:t>
             </a:r>
           </a:p>
           <a:p>
             <a:pPr>
-              <a:defRPr sz="2200"/>
+              <a:spcAft>
+                <a:spcPts val="1000"/>
+              </a:spcAft>
             </a:pPr>
             <a:r>
+              <a:rPr sz="2000">
+                <a:solidFill>
+                  <a:srgbClr val="C5A059"/>
+                </a:solidFill>
+              </a:rPr>
+              <a:t>●  </a:t>
+            </a:r>
+            <a:r>
+              <a:rPr sz="2000" b="1">
+                <a:solidFill>
+                  <a:srgbClr val="003B70"/>
+                </a:solidFill>
+              </a:rPr>
               <a:t>Complete-case analysis on the cleaned data.</a:t>
             </a:r>
           </a:p>
           <a:p>
             <a:pPr>
-              <a:defRPr sz="2200"/>
+              <a:spcAft>
+                <a:spcPts val="1000"/>
+              </a:spcAft>
             </a:pPr>
             <a:r>
+              <a:rPr sz="2000">
+                <a:solidFill>
+                  <a:srgbClr val="C5A059"/>
+                </a:solidFill>
+              </a:rPr>
+              <a:t>●  </a:t>
+            </a:r>
+            <a:r>
+              <a:rPr sz="2000" b="1">
+                <a:solidFill>
+                  <a:srgbClr val="003B70"/>
+                </a:solidFill>
+              </a:rPr>
               <a:t>Model comparison via likelihood-ratio tests, deviance, and AIC.</a:t>
             </a:r>
           </a:p>
           <a:p>
             <a:pPr>
-              <a:defRPr sz="2200"/>
+              <a:spcAft>
+                <a:spcPts val="1000"/>
+              </a:spcAft>
             </a:pPr>
             <a:r>
+              <a:rPr sz="2000">
+                <a:solidFill>
+                  <a:srgbClr val="C5A059"/>
+                </a:solidFill>
+              </a:rPr>
+              <a:t>●  </a:t>
+            </a:r>
+            <a:r>
+              <a:rPr sz="2000" b="1">
+                <a:solidFill>
+                  <a:srgbClr val="003B70"/>
+                </a:solidFill>
+              </a:rPr>
               <a:t>Tree/ensemble ML kept only as an out-of-scope appendix.</a:t>
+            </a:r>
+          </a:p>
+        </p:txBody>
+      </p:sp>
+      <p:sp>
+        <p:nvSpPr>
+          <p:cNvPr id="7" name="Rectangle 6"/>
+          <p:cNvSpPr/>
+          <p:nvPr/>
+        </p:nvSpPr>
+        <p:spPr>
+          <a:xfrm>
+            <a:off x="502920" y="6419088"/>
+            <a:ext cx="11185855" cy="15240"/>
+          </a:xfrm>
+          <a:prstGeom prst="rect">
+            <a:avLst/>
+          </a:prstGeom>
+          <a:solidFill>
+            <a:srgbClr val="6CACE4"/>
+          </a:solidFill>
+          <a:ln>
+            <a:noFill/>
+          </a:ln>
+          <a:effectLst/>
+        </p:spPr>
+        <p:style>
+          <a:lnRef idx="1">
+            <a:schemeClr val="accent1"/>
+          </a:lnRef>
+          <a:fillRef idx="3">
+            <a:schemeClr val="accent1"/>
+          </a:fillRef>
+          <a:effectRef idx="2">
+            <a:schemeClr val="accent1"/>
+          </a:effectRef>
+          <a:fontRef idx="minor">
+            <a:schemeClr val="lt1"/>
+          </a:fontRef>
+        </p:style>
+        <p:txBody>
+          <a:bodyPr rtlCol="0" anchor="ctr"/>
+          <a:lstStyle/>
+          <a:p>
+            <a:pPr algn="ctr"/>
+          </a:p>
+        </p:txBody>
+      </p:sp>
+      <p:sp>
+        <p:nvSpPr>
+          <p:cNvPr id="8" name="TextBox 7"/>
+          <p:cNvSpPr txBox="1"/>
+          <p:nvPr/>
+        </p:nvSpPr>
+        <p:spPr>
+          <a:xfrm>
+            <a:off x="502920" y="6455664"/>
+            <a:ext cx="8229600" cy="320040"/>
+          </a:xfrm>
+          <a:prstGeom prst="rect">
+            <a:avLst/>
+          </a:prstGeom>
+          <a:noFill/>
+        </p:spPr>
+        <p:txBody>
+          <a:bodyPr wrap="square" anchor="t">
+            <a:spAutoFit/>
+          </a:bodyPr>
+          <a:lstStyle/>
+          <a:p>
+            <a:r>
+              <a:rPr sz="1000">
+                <a:solidFill>
+                  <a:srgbClr val="54585A"/>
+                </a:solidFill>
+              </a:rPr>
+              <a:t>University of San Diego · Shiley-Marcos School of Engineering</a:t>
+            </a:r>
+          </a:p>
+        </p:txBody>
+      </p:sp>
+      <p:sp>
+        <p:nvSpPr>
+          <p:cNvPr id="9" name="TextBox 8"/>
+          <p:cNvSpPr txBox="1"/>
+          <p:nvPr/>
+        </p:nvSpPr>
+        <p:spPr>
+          <a:xfrm>
+            <a:off x="10911535" y="6455664"/>
+            <a:ext cx="777240" cy="320040"/>
+          </a:xfrm>
+          <a:prstGeom prst="rect">
+            <a:avLst/>
+          </a:prstGeom>
+          <a:noFill/>
+        </p:spPr>
+        <p:txBody>
+          <a:bodyPr wrap="square" anchor="t">
+            <a:spAutoFit/>
+          </a:bodyPr>
+          <a:lstStyle/>
+          <a:p>
+            <a:pPr algn="r"/>
+            <a:r>
+              <a:rPr sz="1100" b="1">
+                <a:solidFill>
+                  <a:srgbClr val="003B70"/>
+                </a:solidFill>
+              </a:rPr>
+              <a:t>9</a:t>
             </a:r>
           </a:p>
         </p:txBody>
@@ -3254,6 +3812,14 @@
 <file path=ppt/slides/slide11.xml><?xml version="1.0" encoding="utf-8"?>
 <p:sld xmlns:a="http://schemas.openxmlformats.org/drawingml/2006/main" xmlns:p="http://schemas.openxmlformats.org/presentationml/2006/main" xmlns:r="http://schemas.openxmlformats.org/officeDocument/2006/relationships">
   <p:cSld>
+    <p:bg>
+      <p:bgPr>
+        <a:solidFill>
+          <a:srgbClr val="FFFFFF"/>
+        </a:solidFill>
+        <a:effectLst/>
+      </p:bgPr>
+    </p:bg>
     <p:spTree>
       <p:nvGrpSpPr>
         <p:cNvPr id="1" name=""/>
@@ -3263,20 +3829,164 @@
       <p:grpSpPr/>
       <p:sp>
         <p:nvSpPr>
-          <p:cNvPr id="2" name="Title 1"/>
-          <p:cNvSpPr>
-            <a:spLocks noGrp="1"/>
-          </p:cNvSpPr>
-          <p:nvPr>
-            <p:ph type="title"/>
-          </p:nvPr>
-        </p:nvSpPr>
-        <p:spPr/>
-        <p:txBody>
-          <a:bodyPr/>
-          <a:lstStyle/>
-          <a:p>
-            <a:r>
+          <p:cNvPr id="2" name="Rectangle 1"/>
+          <p:cNvSpPr/>
+          <p:nvPr/>
+        </p:nvSpPr>
+        <p:spPr>
+          <a:xfrm>
+            <a:off x="0" y="0"/>
+            <a:ext cx="12191695" cy="1051560"/>
+          </a:xfrm>
+          <a:prstGeom prst="rect">
+            <a:avLst/>
+          </a:prstGeom>
+          <a:solidFill>
+            <a:srgbClr val="003B70"/>
+          </a:solidFill>
+          <a:ln>
+            <a:noFill/>
+          </a:ln>
+          <a:effectLst/>
+        </p:spPr>
+        <p:style>
+          <a:lnRef idx="1">
+            <a:schemeClr val="accent1"/>
+          </a:lnRef>
+          <a:fillRef idx="3">
+            <a:schemeClr val="accent1"/>
+          </a:fillRef>
+          <a:effectRef idx="2">
+            <a:schemeClr val="accent1"/>
+          </a:effectRef>
+          <a:fontRef idx="minor">
+            <a:schemeClr val="lt1"/>
+          </a:fontRef>
+        </p:style>
+        <p:txBody>
+          <a:bodyPr rtlCol="0" anchor="ctr"/>
+          <a:lstStyle/>
+          <a:p>
+            <a:pPr algn="ctr"/>
+          </a:p>
+        </p:txBody>
+      </p:sp>
+      <p:sp>
+        <p:nvSpPr>
+          <p:cNvPr id="3" name="Rectangle 2"/>
+          <p:cNvSpPr/>
+          <p:nvPr/>
+        </p:nvSpPr>
+        <p:spPr>
+          <a:xfrm>
+            <a:off x="0" y="1051560"/>
+            <a:ext cx="2926080" cy="82296"/>
+          </a:xfrm>
+          <a:prstGeom prst="rect">
+            <a:avLst/>
+          </a:prstGeom>
+          <a:solidFill>
+            <a:srgbClr val="C5A059"/>
+          </a:solidFill>
+          <a:ln>
+            <a:noFill/>
+          </a:ln>
+          <a:effectLst/>
+        </p:spPr>
+        <p:style>
+          <a:lnRef idx="1">
+            <a:schemeClr val="accent1"/>
+          </a:lnRef>
+          <a:fillRef idx="3">
+            <a:schemeClr val="accent1"/>
+          </a:fillRef>
+          <a:effectRef idx="2">
+            <a:schemeClr val="accent1"/>
+          </a:effectRef>
+          <a:fontRef idx="minor">
+            <a:schemeClr val="lt1"/>
+          </a:fontRef>
+        </p:style>
+        <p:txBody>
+          <a:bodyPr rtlCol="0" anchor="ctr"/>
+          <a:lstStyle/>
+          <a:p>
+            <a:pPr algn="ctr"/>
+          </a:p>
+        </p:txBody>
+      </p:sp>
+      <p:sp>
+        <p:nvSpPr>
+          <p:cNvPr id="4" name="Rectangle 3"/>
+          <p:cNvSpPr/>
+          <p:nvPr/>
+        </p:nvSpPr>
+        <p:spPr>
+          <a:xfrm>
+            <a:off x="2926080" y="1051560"/>
+            <a:ext cx="9265615" cy="82296"/>
+          </a:xfrm>
+          <a:prstGeom prst="rect">
+            <a:avLst/>
+          </a:prstGeom>
+          <a:solidFill>
+            <a:srgbClr val="6CACE4"/>
+          </a:solidFill>
+          <a:ln>
+            <a:noFill/>
+          </a:ln>
+          <a:effectLst/>
+        </p:spPr>
+        <p:style>
+          <a:lnRef idx="1">
+            <a:schemeClr val="accent1"/>
+          </a:lnRef>
+          <a:fillRef idx="3">
+            <a:schemeClr val="accent1"/>
+          </a:fillRef>
+          <a:effectRef idx="2">
+            <a:schemeClr val="accent1"/>
+          </a:effectRef>
+          <a:fontRef idx="minor">
+            <a:schemeClr val="lt1"/>
+          </a:fontRef>
+        </p:style>
+        <p:txBody>
+          <a:bodyPr rtlCol="0" anchor="ctr"/>
+          <a:lstStyle/>
+          <a:p>
+            <a:pPr algn="ctr"/>
+          </a:p>
+        </p:txBody>
+      </p:sp>
+      <p:sp>
+        <p:nvSpPr>
+          <p:cNvPr id="5" name="TextBox 4"/>
+          <p:cNvSpPr txBox="1"/>
+          <p:nvPr/>
+        </p:nvSpPr>
+        <p:spPr>
+          <a:xfrm>
+            <a:off x="502920" y="0"/>
+            <a:ext cx="11185855" cy="1051560"/>
+          </a:xfrm>
+          <a:prstGeom prst="rect">
+            <a:avLst/>
+          </a:prstGeom>
+          <a:noFill/>
+        </p:spPr>
+        <p:txBody>
+          <a:bodyPr wrap="square" anchor="ctr">
+            <a:spAutoFit/>
+          </a:bodyPr>
+          <a:lstStyle/>
+          <a:p>
+            <a:r>
+              <a:rPr sz="2800" b="1">
+                <a:solidFill>
+                  <a:srgbClr val="FFFFFF"/>
+                </a:solidFill>
+              </a:rPr>
               <a:t>Model Results</a:t>
             </a:r>
           </a:p>
@@ -3284,7 +3994,7 @@
       </p:sp>
       <p:pic>
         <p:nvPicPr>
-          <p:cNvPr id="3" name="Picture 2" descr="fig_odds_ratios.png"/>
+          <p:cNvPr id="6" name="Picture 5" descr="fig_odds_ratios.png"/>
           <p:cNvPicPr>
             <a:picLocks noChangeAspect="1"/>
           </p:cNvPicPr>
@@ -3298,8 +4008,8 @@
         </p:blipFill>
         <p:spPr>
           <a:xfrm>
-            <a:off x="365760" y="1280160"/>
-            <a:ext cx="6878363" cy="5120640"/>
+            <a:off x="457200" y="1554480"/>
+            <a:ext cx="6172200" cy="4572000"/>
           </a:xfrm>
           <a:prstGeom prst="rect">
             <a:avLst/>
@@ -3308,14 +4018,14 @@
       </p:pic>
       <p:sp>
         <p:nvSpPr>
-          <p:cNvPr id="4" name="TextBox 3"/>
+          <p:cNvPr id="7" name="TextBox 6"/>
           <p:cNvSpPr txBox="1"/>
           <p:nvPr/>
         </p:nvSpPr>
         <p:spPr>
           <a:xfrm>
-            <a:off x="7498079" y="1463040"/>
-            <a:ext cx="4389120" cy="4754880"/>
+            <a:off x="7955279" y="1737360"/>
+            <a:ext cx="3931920" cy="4389120"/>
           </a:xfrm>
           <a:prstGeom prst="rect">
             <a:avLst/>
@@ -3323,48 +4033,234 @@
           <a:noFill/>
         </p:spPr>
         <p:txBody>
-          <a:bodyPr wrap="square">
+          <a:bodyPr wrap="square" anchor="t">
             <a:spAutoFit/>
           </a:bodyPr>
           <a:lstStyle/>
           <a:p>
             <a:pPr>
-              <a:defRPr sz="1800"/>
+              <a:spcAft>
+                <a:spcPts val="1000"/>
+              </a:spcAft>
             </a:pPr>
             <a:r>
+              <a:rPr sz="2000">
+                <a:solidFill>
+                  <a:srgbClr val="C5A059"/>
+                </a:solidFill>
+              </a:rPr>
+              <a:t>●  </a:t>
+            </a:r>
+            <a:r>
+              <a:rPr sz="2000" b="1">
+                <a:solidFill>
+                  <a:srgbClr val="003B70"/>
+                </a:solidFill>
+              </a:rPr>
               <a:t>Protective (OR&lt;1): adherence, ACE inhibitor, beta blocker</a:t>
             </a:r>
           </a:p>
           <a:p>
             <a:pPr>
-              <a:defRPr sz="1800"/>
+              <a:spcAft>
+                <a:spcPts val="1000"/>
+              </a:spcAft>
             </a:pPr>
             <a:r>
+              <a:rPr sz="2000">
+                <a:solidFill>
+                  <a:srgbClr val="C5A059"/>
+                </a:solidFill>
+              </a:rPr>
+              <a:t>●  </a:t>
+            </a:r>
+            <a:r>
+              <a:rPr sz="2000" b="1">
+                <a:solidFill>
+                  <a:srgbClr val="003B70"/>
+                </a:solidFill>
+              </a:rPr>
               <a:t>Risk (OR&gt;1): BNP, age, distance, creatinine</a:t>
             </a:r>
           </a:p>
           <a:p>
             <a:pPr>
-              <a:defRPr sz="1800"/>
+              <a:spcAft>
+                <a:spcPts val="1000"/>
+              </a:spcAft>
             </a:pPr>
             <a:r>
+              <a:rPr sz="2000">
+                <a:solidFill>
+                  <a:srgbClr val="C5A059"/>
+                </a:solidFill>
+              </a:rPr>
+              <a:t>●  </a:t>
+            </a:r>
+            <a:r>
+              <a:rPr sz="2000" b="1">
+                <a:solidFill>
+                  <a:srgbClr val="003B70"/>
+                </a:solidFill>
+              </a:rPr>
               <a:t>LR vs null: χ²=283, p≈2e-51</a:t>
             </a:r>
           </a:p>
           <a:p>
             <a:pPr>
-              <a:defRPr sz="1800"/>
+              <a:spcAft>
+                <a:spcPts val="1000"/>
+              </a:spcAft>
             </a:pPr>
             <a:r>
+              <a:rPr sz="2000">
+                <a:solidFill>
+                  <a:srgbClr val="C5A059"/>
+                </a:solidFill>
+              </a:rPr>
+              <a:t>●  </a:t>
+            </a:r>
+            <a:r>
+              <a:rPr sz="2000" b="1">
+                <a:solidFill>
+                  <a:srgbClr val="003B70"/>
+                </a:solidFill>
+              </a:rPr>
               <a:t>Pseudo-R² ≈ 0.08 (modest)</a:t>
             </a:r>
           </a:p>
           <a:p>
             <a:pPr>
-              <a:defRPr sz="1800"/>
+              <a:spcAft>
+                <a:spcPts val="1000"/>
+              </a:spcAft>
             </a:pPr>
             <a:r>
+              <a:rPr sz="2000">
+                <a:solidFill>
+                  <a:srgbClr val="C5A059"/>
+                </a:solidFill>
+              </a:rPr>
+              <a:t>●  </a:t>
+            </a:r>
+            <a:r>
+              <a:rPr sz="2000" b="1">
+                <a:solidFill>
+                  <a:srgbClr val="003B70"/>
+                </a:solidFill>
+              </a:rPr>
               <a:t>Accuracy 0.654 vs 0.583 baseline</a:t>
+            </a:r>
+          </a:p>
+        </p:txBody>
+      </p:sp>
+      <p:sp>
+        <p:nvSpPr>
+          <p:cNvPr id="8" name="Rectangle 7"/>
+          <p:cNvSpPr/>
+          <p:nvPr/>
+        </p:nvSpPr>
+        <p:spPr>
+          <a:xfrm>
+            <a:off x="502920" y="6419088"/>
+            <a:ext cx="11185855" cy="15240"/>
+          </a:xfrm>
+          <a:prstGeom prst="rect">
+            <a:avLst/>
+          </a:prstGeom>
+          <a:solidFill>
+            <a:srgbClr val="6CACE4"/>
+          </a:solidFill>
+          <a:ln>
+            <a:noFill/>
+          </a:ln>
+          <a:effectLst/>
+        </p:spPr>
+        <p:style>
+          <a:lnRef idx="1">
+            <a:schemeClr val="accent1"/>
+          </a:lnRef>
+          <a:fillRef idx="3">
+            <a:schemeClr val="accent1"/>
+          </a:fillRef>
+          <a:effectRef idx="2">
+            <a:schemeClr val="accent1"/>
+          </a:effectRef>
+          <a:fontRef idx="minor">
+            <a:schemeClr val="lt1"/>
+          </a:fontRef>
+        </p:style>
+        <p:txBody>
+          <a:bodyPr rtlCol="0" anchor="ctr"/>
+          <a:lstStyle/>
+          <a:p>
+            <a:pPr algn="ctr"/>
+          </a:p>
+        </p:txBody>
+      </p:sp>
+      <p:sp>
+        <p:nvSpPr>
+          <p:cNvPr id="9" name="TextBox 8"/>
+          <p:cNvSpPr txBox="1"/>
+          <p:nvPr/>
+        </p:nvSpPr>
+        <p:spPr>
+          <a:xfrm>
+            <a:off x="502920" y="6455664"/>
+            <a:ext cx="8229600" cy="320040"/>
+          </a:xfrm>
+          <a:prstGeom prst="rect">
+            <a:avLst/>
+          </a:prstGeom>
+          <a:noFill/>
+        </p:spPr>
+        <p:txBody>
+          <a:bodyPr wrap="square" anchor="t">
+            <a:spAutoFit/>
+          </a:bodyPr>
+          <a:lstStyle/>
+          <a:p>
+            <a:r>
+              <a:rPr sz="1000">
+                <a:solidFill>
+                  <a:srgbClr val="54585A"/>
+                </a:solidFill>
+              </a:rPr>
+              <a:t>University of San Diego · Shiley-Marcos School of Engineering</a:t>
+            </a:r>
+          </a:p>
+        </p:txBody>
+      </p:sp>
+      <p:sp>
+        <p:nvSpPr>
+          <p:cNvPr id="10" name="TextBox 9"/>
+          <p:cNvSpPr txBox="1"/>
+          <p:nvPr/>
+        </p:nvSpPr>
+        <p:spPr>
+          <a:xfrm>
+            <a:off x="10911535" y="6455664"/>
+            <a:ext cx="777240" cy="320040"/>
+          </a:xfrm>
+          <a:prstGeom prst="rect">
+            <a:avLst/>
+          </a:prstGeom>
+          <a:noFill/>
+        </p:spPr>
+        <p:txBody>
+          <a:bodyPr wrap="square" anchor="t">
+            <a:spAutoFit/>
+          </a:bodyPr>
+          <a:lstStyle/>
+          <a:p>
+            <a:pPr algn="r"/>
+            <a:r>
+              <a:rPr sz="1100" b="1">
+                <a:solidFill>
+                  <a:srgbClr val="003B70"/>
+                </a:solidFill>
+              </a:rPr>
+              <a:t>10</a:t>
             </a:r>
           </a:p>
         </p:txBody>
@@ -3380,6 +4276,14 @@
 <file path=ppt/slides/slide12.xml><?xml version="1.0" encoding="utf-8"?>
 <p:sld xmlns:a="http://schemas.openxmlformats.org/drawingml/2006/main" xmlns:p="http://schemas.openxmlformats.org/presentationml/2006/main" xmlns:r="http://schemas.openxmlformats.org/officeDocument/2006/relationships">
   <p:cSld>
+    <p:bg>
+      <p:bgPr>
+        <a:solidFill>
+          <a:srgbClr val="FFFFFF"/>
+        </a:solidFill>
+        <a:effectLst/>
+      </p:bgPr>
+    </p:bg>
     <p:spTree>
       <p:nvGrpSpPr>
         <p:cNvPr id="1" name=""/>
@@ -3389,20 +4293,164 @@
       <p:grpSpPr/>
       <p:sp>
         <p:nvSpPr>
-          <p:cNvPr id="2" name="Title 1"/>
-          <p:cNvSpPr>
-            <a:spLocks noGrp="1"/>
-          </p:cNvSpPr>
-          <p:nvPr>
-            <p:ph type="title"/>
-          </p:nvPr>
-        </p:nvSpPr>
-        <p:spPr/>
-        <p:txBody>
-          <a:bodyPr/>
-          <a:lstStyle/>
-          <a:p>
-            <a:r>
+          <p:cNvPr id="2" name="Rectangle 1"/>
+          <p:cNvSpPr/>
+          <p:nvPr/>
+        </p:nvSpPr>
+        <p:spPr>
+          <a:xfrm>
+            <a:off x="0" y="0"/>
+            <a:ext cx="12191695" cy="1051560"/>
+          </a:xfrm>
+          <a:prstGeom prst="rect">
+            <a:avLst/>
+          </a:prstGeom>
+          <a:solidFill>
+            <a:srgbClr val="003B70"/>
+          </a:solidFill>
+          <a:ln>
+            <a:noFill/>
+          </a:ln>
+          <a:effectLst/>
+        </p:spPr>
+        <p:style>
+          <a:lnRef idx="1">
+            <a:schemeClr val="accent1"/>
+          </a:lnRef>
+          <a:fillRef idx="3">
+            <a:schemeClr val="accent1"/>
+          </a:fillRef>
+          <a:effectRef idx="2">
+            <a:schemeClr val="accent1"/>
+          </a:effectRef>
+          <a:fontRef idx="minor">
+            <a:schemeClr val="lt1"/>
+          </a:fontRef>
+        </p:style>
+        <p:txBody>
+          <a:bodyPr rtlCol="0" anchor="ctr"/>
+          <a:lstStyle/>
+          <a:p>
+            <a:pPr algn="ctr"/>
+          </a:p>
+        </p:txBody>
+      </p:sp>
+      <p:sp>
+        <p:nvSpPr>
+          <p:cNvPr id="3" name="Rectangle 2"/>
+          <p:cNvSpPr/>
+          <p:nvPr/>
+        </p:nvSpPr>
+        <p:spPr>
+          <a:xfrm>
+            <a:off x="0" y="1051560"/>
+            <a:ext cx="2926080" cy="82296"/>
+          </a:xfrm>
+          <a:prstGeom prst="rect">
+            <a:avLst/>
+          </a:prstGeom>
+          <a:solidFill>
+            <a:srgbClr val="C5A059"/>
+          </a:solidFill>
+          <a:ln>
+            <a:noFill/>
+          </a:ln>
+          <a:effectLst/>
+        </p:spPr>
+        <p:style>
+          <a:lnRef idx="1">
+            <a:schemeClr val="accent1"/>
+          </a:lnRef>
+          <a:fillRef idx="3">
+            <a:schemeClr val="accent1"/>
+          </a:fillRef>
+          <a:effectRef idx="2">
+            <a:schemeClr val="accent1"/>
+          </a:effectRef>
+          <a:fontRef idx="minor">
+            <a:schemeClr val="lt1"/>
+          </a:fontRef>
+        </p:style>
+        <p:txBody>
+          <a:bodyPr rtlCol="0" anchor="ctr"/>
+          <a:lstStyle/>
+          <a:p>
+            <a:pPr algn="ctr"/>
+          </a:p>
+        </p:txBody>
+      </p:sp>
+      <p:sp>
+        <p:nvSpPr>
+          <p:cNvPr id="4" name="Rectangle 3"/>
+          <p:cNvSpPr/>
+          <p:nvPr/>
+        </p:nvSpPr>
+        <p:spPr>
+          <a:xfrm>
+            <a:off x="2926080" y="1051560"/>
+            <a:ext cx="9265615" cy="82296"/>
+          </a:xfrm>
+          <a:prstGeom prst="rect">
+            <a:avLst/>
+          </a:prstGeom>
+          <a:solidFill>
+            <a:srgbClr val="6CACE4"/>
+          </a:solidFill>
+          <a:ln>
+            <a:noFill/>
+          </a:ln>
+          <a:effectLst/>
+        </p:spPr>
+        <p:style>
+          <a:lnRef idx="1">
+            <a:schemeClr val="accent1"/>
+          </a:lnRef>
+          <a:fillRef idx="3">
+            <a:schemeClr val="accent1"/>
+          </a:fillRef>
+          <a:effectRef idx="2">
+            <a:schemeClr val="accent1"/>
+          </a:effectRef>
+          <a:fontRef idx="minor">
+            <a:schemeClr val="lt1"/>
+          </a:fontRef>
+        </p:style>
+        <p:txBody>
+          <a:bodyPr rtlCol="0" anchor="ctr"/>
+          <a:lstStyle/>
+          <a:p>
+            <a:pPr algn="ctr"/>
+          </a:p>
+        </p:txBody>
+      </p:sp>
+      <p:sp>
+        <p:nvSpPr>
+          <p:cNvPr id="5" name="TextBox 4"/>
+          <p:cNvSpPr txBox="1"/>
+          <p:nvPr/>
+        </p:nvSpPr>
+        <p:spPr>
+          <a:xfrm>
+            <a:off x="502920" y="0"/>
+            <a:ext cx="11185855" cy="1051560"/>
+          </a:xfrm>
+          <a:prstGeom prst="rect">
+            <a:avLst/>
+          </a:prstGeom>
+          <a:noFill/>
+        </p:spPr>
+        <p:txBody>
+          <a:bodyPr wrap="square" anchor="ctr">
+            <a:spAutoFit/>
+          </a:bodyPr>
+          <a:lstStyle/>
+          <a:p>
+            <a:r>
+              <a:rPr sz="2800" b="1">
+                <a:solidFill>
+                  <a:srgbClr val="FFFFFF"/>
+                </a:solidFill>
+              </a:rPr>
               <a:t>Key Findings &amp; Recommendations</a:t>
             </a:r>
           </a:p>
@@ -3410,56 +4458,249 @@
       </p:sp>
       <p:sp>
         <p:nvSpPr>
-          <p:cNvPr id="3" name="Content Placeholder 2"/>
-          <p:cNvSpPr>
-            <a:spLocks noGrp="1"/>
-          </p:cNvSpPr>
-          <p:nvPr>
-            <p:ph idx="1"/>
-          </p:nvPr>
-        </p:nvSpPr>
-        <p:spPr/>
-        <p:txBody>
-          <a:bodyPr/>
+          <p:cNvPr id="6" name="TextBox 5"/>
+          <p:cNvSpPr txBox="1"/>
+          <p:nvPr/>
+        </p:nvSpPr>
+        <p:spPr>
+          <a:xfrm>
+            <a:off x="640080" y="1554480"/>
+            <a:ext cx="10972800" cy="4663440"/>
+          </a:xfrm>
+          <a:prstGeom prst="rect">
+            <a:avLst/>
+          </a:prstGeom>
+          <a:noFill/>
+        </p:spPr>
+        <p:txBody>
+          <a:bodyPr wrap="square" anchor="t">
+            <a:spAutoFit/>
+          </a:bodyPr>
           <a:lstStyle/>
           <a:p>
             <a:pPr>
-              <a:defRPr sz="2200"/>
+              <a:spcAft>
+                <a:spcPts val="1000"/>
+              </a:spcAft>
             </a:pPr>
             <a:r>
+              <a:rPr sz="2000">
+                <a:solidFill>
+                  <a:srgbClr val="C5A059"/>
+                </a:solidFill>
+              </a:rPr>
+              <a:t>●  </a:t>
+            </a:r>
+            <a:r>
+              <a:rPr sz="2000" b="1">
+                <a:solidFill>
+                  <a:srgbClr val="003B70"/>
+                </a:solidFill>
+              </a:rPr>
               <a:t>Medication adherence is the strongest signal — lower adherence, higher risk.</a:t>
             </a:r>
           </a:p>
           <a:p>
             <a:pPr>
-              <a:defRPr sz="2200"/>
+              <a:spcAft>
+                <a:spcPts val="1000"/>
+              </a:spcAft>
             </a:pPr>
             <a:r>
+              <a:rPr sz="2000">
+                <a:solidFill>
+                  <a:srgbClr val="C5A059"/>
+                </a:solidFill>
+              </a:rPr>
+              <a:t>●  </a:t>
+            </a:r>
+            <a:r>
+              <a:rPr sz="2000" b="1">
+                <a:solidFill>
+                  <a:srgbClr val="003B70"/>
+                </a:solidFill>
+              </a:rPr>
               <a:t>Elevated BNP and older age are the main clinical risk markers.</a:t>
             </a:r>
           </a:p>
           <a:p>
             <a:pPr>
-              <a:defRPr sz="2200"/>
+              <a:spcAft>
+                <a:spcPts val="1000"/>
+              </a:spcAft>
             </a:pPr>
             <a:r>
-              <a:t>Treatment with ACE inhibitors / beta blockers is associated with lower risk.</a:t>
+              <a:rPr sz="2000">
+                <a:solidFill>
+                  <a:srgbClr val="C5A059"/>
+                </a:solidFill>
+              </a:rPr>
+              <a:t>●  </a:t>
+            </a:r>
+            <a:r>
+              <a:rPr sz="2000" b="1">
+                <a:solidFill>
+                  <a:srgbClr val="003B70"/>
+                </a:solidFill>
+              </a:rPr>
+              <a:t>ACE inhibitors / beta blockers are associated with lower risk.</a:t>
             </a:r>
           </a:p>
           <a:p>
             <a:pPr>
-              <a:defRPr sz="2200"/>
+              <a:spcAft>
+                <a:spcPts val="1000"/>
+              </a:spcAft>
             </a:pPr>
             <a:r>
+              <a:rPr sz="2000">
+                <a:solidFill>
+                  <a:srgbClr val="C5A059"/>
+                </a:solidFill>
+              </a:rPr>
+              <a:t>●  </a:t>
+            </a:r>
+            <a:r>
+              <a:rPr sz="2000" b="1">
+                <a:solidFill>
+                  <a:srgbClr val="003B70"/>
+                </a:solidFill>
+              </a:rPr>
               <a:t>Recommendation: target adherence support and BNP monitoring for high-risk patients.</a:t>
             </a:r>
           </a:p>
           <a:p>
             <a:pPr>
-              <a:defRPr sz="2200"/>
+              <a:spcAft>
+                <a:spcPts val="1000"/>
+              </a:spcAft>
             </a:pPr>
             <a:r>
+              <a:rPr sz="2000">
+                <a:solidFill>
+                  <a:srgbClr val="C5A059"/>
+                </a:solidFill>
+              </a:rPr>
+              <a:t>●  </a:t>
+            </a:r>
+            <a:r>
+              <a:rPr sz="2000" b="1">
+                <a:solidFill>
+                  <a:srgbClr val="003B70"/>
+                </a:solidFill>
+              </a:rPr>
               <a:t>Effects are real but modest — useful for triage, not a standalone decision tool.</a:t>
+            </a:r>
+          </a:p>
+        </p:txBody>
+      </p:sp>
+      <p:sp>
+        <p:nvSpPr>
+          <p:cNvPr id="7" name="Rectangle 6"/>
+          <p:cNvSpPr/>
+          <p:nvPr/>
+        </p:nvSpPr>
+        <p:spPr>
+          <a:xfrm>
+            <a:off x="502920" y="6419088"/>
+            <a:ext cx="11185855" cy="15240"/>
+          </a:xfrm>
+          <a:prstGeom prst="rect">
+            <a:avLst/>
+          </a:prstGeom>
+          <a:solidFill>
+            <a:srgbClr val="6CACE4"/>
+          </a:solidFill>
+          <a:ln>
+            <a:noFill/>
+          </a:ln>
+          <a:effectLst/>
+        </p:spPr>
+        <p:style>
+          <a:lnRef idx="1">
+            <a:schemeClr val="accent1"/>
+          </a:lnRef>
+          <a:fillRef idx="3">
+            <a:schemeClr val="accent1"/>
+          </a:fillRef>
+          <a:effectRef idx="2">
+            <a:schemeClr val="accent1"/>
+          </a:effectRef>
+          <a:fontRef idx="minor">
+            <a:schemeClr val="lt1"/>
+          </a:fontRef>
+        </p:style>
+        <p:txBody>
+          <a:bodyPr rtlCol="0" anchor="ctr"/>
+          <a:lstStyle/>
+          <a:p>
+            <a:pPr algn="ctr"/>
+          </a:p>
+        </p:txBody>
+      </p:sp>
+      <p:sp>
+        <p:nvSpPr>
+          <p:cNvPr id="8" name="TextBox 7"/>
+          <p:cNvSpPr txBox="1"/>
+          <p:nvPr/>
+        </p:nvSpPr>
+        <p:spPr>
+          <a:xfrm>
+            <a:off x="502920" y="6455664"/>
+            <a:ext cx="8229600" cy="320040"/>
+          </a:xfrm>
+          <a:prstGeom prst="rect">
+            <a:avLst/>
+          </a:prstGeom>
+          <a:noFill/>
+        </p:spPr>
+        <p:txBody>
+          <a:bodyPr wrap="square" anchor="t">
+            <a:spAutoFit/>
+          </a:bodyPr>
+          <a:lstStyle/>
+          <a:p>
+            <a:r>
+              <a:rPr sz="1000">
+                <a:solidFill>
+                  <a:srgbClr val="54585A"/>
+                </a:solidFill>
+              </a:rPr>
+              <a:t>University of San Diego · Shiley-Marcos School of Engineering</a:t>
+            </a:r>
+          </a:p>
+        </p:txBody>
+      </p:sp>
+      <p:sp>
+        <p:nvSpPr>
+          <p:cNvPr id="9" name="TextBox 8"/>
+          <p:cNvSpPr txBox="1"/>
+          <p:nvPr/>
+        </p:nvSpPr>
+        <p:spPr>
+          <a:xfrm>
+            <a:off x="10911535" y="6455664"/>
+            <a:ext cx="777240" cy="320040"/>
+          </a:xfrm>
+          <a:prstGeom prst="rect">
+            <a:avLst/>
+          </a:prstGeom>
+          <a:noFill/>
+        </p:spPr>
+        <p:txBody>
+          <a:bodyPr wrap="square" anchor="t">
+            <a:spAutoFit/>
+          </a:bodyPr>
+          <a:lstStyle/>
+          <a:p>
+            <a:pPr algn="r"/>
+            <a:r>
+              <a:rPr sz="1100" b="1">
+                <a:solidFill>
+                  <a:srgbClr val="003B70"/>
+                </a:solidFill>
+              </a:rPr>
+              <a:t>11</a:t>
             </a:r>
           </a:p>
         </p:txBody>
@@ -3475,6 +4716,14 @@
 <file path=ppt/slides/slide13.xml><?xml version="1.0" encoding="utf-8"?>
 <p:sld xmlns:a="http://schemas.openxmlformats.org/drawingml/2006/main" xmlns:p="http://schemas.openxmlformats.org/presentationml/2006/main" xmlns:r="http://schemas.openxmlformats.org/officeDocument/2006/relationships">
   <p:cSld>
+    <p:bg>
+      <p:bgPr>
+        <a:solidFill>
+          <a:srgbClr val="FFFFFF"/>
+        </a:solidFill>
+        <a:effectLst/>
+      </p:bgPr>
+    </p:bg>
     <p:spTree>
       <p:nvGrpSpPr>
         <p:cNvPr id="1" name=""/>
@@ -3484,20 +4733,164 @@
       <p:grpSpPr/>
       <p:sp>
         <p:nvSpPr>
-          <p:cNvPr id="2" name="Title 1"/>
-          <p:cNvSpPr>
-            <a:spLocks noGrp="1"/>
-          </p:cNvSpPr>
-          <p:nvPr>
-            <p:ph type="title"/>
-          </p:nvPr>
-        </p:nvSpPr>
-        <p:spPr/>
-        <p:txBody>
-          <a:bodyPr/>
-          <a:lstStyle/>
-          <a:p>
-            <a:r>
+          <p:cNvPr id="2" name="Rectangle 1"/>
+          <p:cNvSpPr/>
+          <p:nvPr/>
+        </p:nvSpPr>
+        <p:spPr>
+          <a:xfrm>
+            <a:off x="0" y="0"/>
+            <a:ext cx="12191695" cy="1051560"/>
+          </a:xfrm>
+          <a:prstGeom prst="rect">
+            <a:avLst/>
+          </a:prstGeom>
+          <a:solidFill>
+            <a:srgbClr val="003B70"/>
+          </a:solidFill>
+          <a:ln>
+            <a:noFill/>
+          </a:ln>
+          <a:effectLst/>
+        </p:spPr>
+        <p:style>
+          <a:lnRef idx="1">
+            <a:schemeClr val="accent1"/>
+          </a:lnRef>
+          <a:fillRef idx="3">
+            <a:schemeClr val="accent1"/>
+          </a:fillRef>
+          <a:effectRef idx="2">
+            <a:schemeClr val="accent1"/>
+          </a:effectRef>
+          <a:fontRef idx="minor">
+            <a:schemeClr val="lt1"/>
+          </a:fontRef>
+        </p:style>
+        <p:txBody>
+          <a:bodyPr rtlCol="0" anchor="ctr"/>
+          <a:lstStyle/>
+          <a:p>
+            <a:pPr algn="ctr"/>
+          </a:p>
+        </p:txBody>
+      </p:sp>
+      <p:sp>
+        <p:nvSpPr>
+          <p:cNvPr id="3" name="Rectangle 2"/>
+          <p:cNvSpPr/>
+          <p:nvPr/>
+        </p:nvSpPr>
+        <p:spPr>
+          <a:xfrm>
+            <a:off x="0" y="1051560"/>
+            <a:ext cx="2926080" cy="82296"/>
+          </a:xfrm>
+          <a:prstGeom prst="rect">
+            <a:avLst/>
+          </a:prstGeom>
+          <a:solidFill>
+            <a:srgbClr val="C5A059"/>
+          </a:solidFill>
+          <a:ln>
+            <a:noFill/>
+          </a:ln>
+          <a:effectLst/>
+        </p:spPr>
+        <p:style>
+          <a:lnRef idx="1">
+            <a:schemeClr val="accent1"/>
+          </a:lnRef>
+          <a:fillRef idx="3">
+            <a:schemeClr val="accent1"/>
+          </a:fillRef>
+          <a:effectRef idx="2">
+            <a:schemeClr val="accent1"/>
+          </a:effectRef>
+          <a:fontRef idx="minor">
+            <a:schemeClr val="lt1"/>
+          </a:fontRef>
+        </p:style>
+        <p:txBody>
+          <a:bodyPr rtlCol="0" anchor="ctr"/>
+          <a:lstStyle/>
+          <a:p>
+            <a:pPr algn="ctr"/>
+          </a:p>
+        </p:txBody>
+      </p:sp>
+      <p:sp>
+        <p:nvSpPr>
+          <p:cNvPr id="4" name="Rectangle 3"/>
+          <p:cNvSpPr/>
+          <p:nvPr/>
+        </p:nvSpPr>
+        <p:spPr>
+          <a:xfrm>
+            <a:off x="2926080" y="1051560"/>
+            <a:ext cx="9265615" cy="82296"/>
+          </a:xfrm>
+          <a:prstGeom prst="rect">
+            <a:avLst/>
+          </a:prstGeom>
+          <a:solidFill>
+            <a:srgbClr val="6CACE4"/>
+          </a:solidFill>
+          <a:ln>
+            <a:noFill/>
+          </a:ln>
+          <a:effectLst/>
+        </p:spPr>
+        <p:style>
+          <a:lnRef idx="1">
+            <a:schemeClr val="accent1"/>
+          </a:lnRef>
+          <a:fillRef idx="3">
+            <a:schemeClr val="accent1"/>
+          </a:fillRef>
+          <a:effectRef idx="2">
+            <a:schemeClr val="accent1"/>
+          </a:effectRef>
+          <a:fontRef idx="minor">
+            <a:schemeClr val="lt1"/>
+          </a:fontRef>
+        </p:style>
+        <p:txBody>
+          <a:bodyPr rtlCol="0" anchor="ctr"/>
+          <a:lstStyle/>
+          <a:p>
+            <a:pPr algn="ctr"/>
+          </a:p>
+        </p:txBody>
+      </p:sp>
+      <p:sp>
+        <p:nvSpPr>
+          <p:cNvPr id="5" name="TextBox 4"/>
+          <p:cNvSpPr txBox="1"/>
+          <p:nvPr/>
+        </p:nvSpPr>
+        <p:spPr>
+          <a:xfrm>
+            <a:off x="502920" y="0"/>
+            <a:ext cx="11185855" cy="1051560"/>
+          </a:xfrm>
+          <a:prstGeom prst="rect">
+            <a:avLst/>
+          </a:prstGeom>
+          <a:noFill/>
+        </p:spPr>
+        <p:txBody>
+          <a:bodyPr wrap="square" anchor="ctr">
+            <a:spAutoFit/>
+          </a:bodyPr>
+          <a:lstStyle/>
+          <a:p>
+            <a:r>
+              <a:rPr sz="2800" b="1">
+                <a:solidFill>
+                  <a:srgbClr val="FFFFFF"/>
+                </a:solidFill>
+              </a:rPr>
               <a:t>Limitations</a:t>
             </a:r>
           </a:p>
@@ -3505,56 +4898,249 @@
       </p:sp>
       <p:sp>
         <p:nvSpPr>
-          <p:cNvPr id="3" name="Content Placeholder 2"/>
-          <p:cNvSpPr>
-            <a:spLocks noGrp="1"/>
-          </p:cNvSpPr>
-          <p:nvPr>
-            <p:ph idx="1"/>
-          </p:nvPr>
-        </p:nvSpPr>
-        <p:spPr/>
-        <p:txBody>
-          <a:bodyPr/>
+          <p:cNvPr id="6" name="TextBox 5"/>
+          <p:cNvSpPr txBox="1"/>
+          <p:nvPr/>
+        </p:nvSpPr>
+        <p:spPr>
+          <a:xfrm>
+            <a:off x="640080" y="1554480"/>
+            <a:ext cx="10972800" cy="4663440"/>
+          </a:xfrm>
+          <a:prstGeom prst="rect">
+            <a:avLst/>
+          </a:prstGeom>
+          <a:noFill/>
+        </p:spPr>
+        <p:txBody>
+          <a:bodyPr wrap="square" anchor="t">
+            <a:spAutoFit/>
+          </a:bodyPr>
           <a:lstStyle/>
           <a:p>
             <a:pPr>
-              <a:defRPr sz="2200"/>
+              <a:spcAft>
+                <a:spcPts val="1000"/>
+              </a:spcAft>
             </a:pPr>
             <a:r>
+              <a:rPr sz="2000">
+                <a:solidFill>
+                  <a:srgbClr val="C5A059"/>
+                </a:solidFill>
+              </a:rPr>
+              <a:t>●  </a:t>
+            </a:r>
+            <a:r>
+              <a:rPr sz="2000" b="1">
+                <a:solidFill>
+                  <a:srgbClr val="003B70"/>
+                </a:solidFill>
+              </a:rPr>
               <a:t>Single-source observational data — associations are not causal.</a:t>
             </a:r>
           </a:p>
           <a:p>
             <a:pPr>
-              <a:defRPr sz="2200"/>
+              <a:spcAft>
+                <a:spcPts val="1000"/>
+              </a:spcAft>
             </a:pPr>
             <a:r>
+              <a:rPr sz="2000">
+                <a:solidFill>
+                  <a:srgbClr val="C5A059"/>
+                </a:solidFill>
+              </a:rPr>
+              <a:t>●  </a:t>
+            </a:r>
+            <a:r>
+              <a:rPr sz="2000" b="1">
+                <a:solidFill>
+                  <a:srgbClr val="003B70"/>
+                </a:solidFill>
+              </a:rPr>
               <a:t>No time-to-event information, so survival analysis is out of scope.</a:t>
             </a:r>
           </a:p>
           <a:p>
             <a:pPr>
-              <a:defRPr sz="2200"/>
+              <a:spcAft>
+                <a:spcPts val="1000"/>
+              </a:spcAft>
             </a:pPr>
             <a:r>
+              <a:rPr sz="2000">
+                <a:solidFill>
+                  <a:srgbClr val="C5A059"/>
+                </a:solidFill>
+              </a:rPr>
+              <a:t>●  </a:t>
+            </a:r>
+            <a:r>
+              <a:rPr sz="2000" b="1">
+                <a:solidFill>
+                  <a:srgbClr val="003B70"/>
+                </a:solidFill>
+              </a:rPr>
               <a:t>Social determinants are coarsely encoded and likely under-represented.</a:t>
             </a:r>
           </a:p>
           <a:p>
             <a:pPr>
-              <a:defRPr sz="2200"/>
+              <a:spcAft>
+                <a:spcPts val="1000"/>
+              </a:spcAft>
             </a:pPr>
             <a:r>
+              <a:rPr sz="2000">
+                <a:solidFill>
+                  <a:srgbClr val="C5A059"/>
+                </a:solidFill>
+              </a:rPr>
+              <a:t>●  </a:t>
+            </a:r>
+            <a:r>
+              <a:rPr sz="2000" b="1">
+                <a:solidFill>
+                  <a:srgbClr val="003B70"/>
+                </a:solidFill>
+              </a:rPr>
               <a:t>Modest model fit; predictors explain little variance individually.</a:t>
             </a:r>
           </a:p>
           <a:p>
             <a:pPr>
-              <a:defRPr sz="2200"/>
+              <a:spcAft>
+                <a:spcPts val="1000"/>
+              </a:spcAft>
             </a:pPr>
             <a:r>
+              <a:rPr sz="2000">
+                <a:solidFill>
+                  <a:srgbClr val="C5A059"/>
+                </a:solidFill>
+              </a:rPr>
+              <a:t>●  </a:t>
+            </a:r>
+            <a:r>
+              <a:rPr sz="2000" b="1">
+                <a:solidFill>
+                  <a:srgbClr val="003B70"/>
+                </a:solidFill>
+              </a:rPr>
               <a:t>Coursework analysis — not validated for clinical deployment.</a:t>
+            </a:r>
+          </a:p>
+        </p:txBody>
+      </p:sp>
+      <p:sp>
+        <p:nvSpPr>
+          <p:cNvPr id="7" name="Rectangle 6"/>
+          <p:cNvSpPr/>
+          <p:nvPr/>
+        </p:nvSpPr>
+        <p:spPr>
+          <a:xfrm>
+            <a:off x="502920" y="6419088"/>
+            <a:ext cx="11185855" cy="15240"/>
+          </a:xfrm>
+          <a:prstGeom prst="rect">
+            <a:avLst/>
+          </a:prstGeom>
+          <a:solidFill>
+            <a:srgbClr val="6CACE4"/>
+          </a:solidFill>
+          <a:ln>
+            <a:noFill/>
+          </a:ln>
+          <a:effectLst/>
+        </p:spPr>
+        <p:style>
+          <a:lnRef idx="1">
+            <a:schemeClr val="accent1"/>
+          </a:lnRef>
+          <a:fillRef idx="3">
+            <a:schemeClr val="accent1"/>
+          </a:fillRef>
+          <a:effectRef idx="2">
+            <a:schemeClr val="accent1"/>
+          </a:effectRef>
+          <a:fontRef idx="minor">
+            <a:schemeClr val="lt1"/>
+          </a:fontRef>
+        </p:style>
+        <p:txBody>
+          <a:bodyPr rtlCol="0" anchor="ctr"/>
+          <a:lstStyle/>
+          <a:p>
+            <a:pPr algn="ctr"/>
+          </a:p>
+        </p:txBody>
+      </p:sp>
+      <p:sp>
+        <p:nvSpPr>
+          <p:cNvPr id="8" name="TextBox 7"/>
+          <p:cNvSpPr txBox="1"/>
+          <p:nvPr/>
+        </p:nvSpPr>
+        <p:spPr>
+          <a:xfrm>
+            <a:off x="502920" y="6455664"/>
+            <a:ext cx="8229600" cy="320040"/>
+          </a:xfrm>
+          <a:prstGeom prst="rect">
+            <a:avLst/>
+          </a:prstGeom>
+          <a:noFill/>
+        </p:spPr>
+        <p:txBody>
+          <a:bodyPr wrap="square" anchor="t">
+            <a:spAutoFit/>
+          </a:bodyPr>
+          <a:lstStyle/>
+          <a:p>
+            <a:r>
+              <a:rPr sz="1000">
+                <a:solidFill>
+                  <a:srgbClr val="54585A"/>
+                </a:solidFill>
+              </a:rPr>
+              <a:t>University of San Diego · Shiley-Marcos School of Engineering</a:t>
+            </a:r>
+          </a:p>
+        </p:txBody>
+      </p:sp>
+      <p:sp>
+        <p:nvSpPr>
+          <p:cNvPr id="9" name="TextBox 8"/>
+          <p:cNvSpPr txBox="1"/>
+          <p:nvPr/>
+        </p:nvSpPr>
+        <p:spPr>
+          <a:xfrm>
+            <a:off x="10911535" y="6455664"/>
+            <a:ext cx="777240" cy="320040"/>
+          </a:xfrm>
+          <a:prstGeom prst="rect">
+            <a:avLst/>
+          </a:prstGeom>
+          <a:noFill/>
+        </p:spPr>
+        <p:txBody>
+          <a:bodyPr wrap="square" anchor="t">
+            <a:spAutoFit/>
+          </a:bodyPr>
+          <a:lstStyle/>
+          <a:p>
+            <a:pPr algn="r"/>
+            <a:r>
+              <a:rPr sz="1100" b="1">
+                <a:solidFill>
+                  <a:srgbClr val="003B70"/>
+                </a:solidFill>
+              </a:rPr>
+              <a:t>12</a:t>
             </a:r>
           </a:p>
         </p:txBody>
@@ -3570,6 +5156,14 @@
 <file path=ppt/slides/slide14.xml><?xml version="1.0" encoding="utf-8"?>
 <p:sld xmlns:a="http://schemas.openxmlformats.org/drawingml/2006/main" xmlns:p="http://schemas.openxmlformats.org/presentationml/2006/main" xmlns:r="http://schemas.openxmlformats.org/officeDocument/2006/relationships">
   <p:cSld>
+    <p:bg>
+      <p:bgPr>
+        <a:solidFill>
+          <a:srgbClr val="FFFFFF"/>
+        </a:solidFill>
+        <a:effectLst/>
+      </p:bgPr>
+    </p:bg>
     <p:spTree>
       <p:nvGrpSpPr>
         <p:cNvPr id="1" name=""/>
@@ -3579,20 +5173,164 @@
       <p:grpSpPr/>
       <p:sp>
         <p:nvSpPr>
-          <p:cNvPr id="2" name="Title 1"/>
-          <p:cNvSpPr>
-            <a:spLocks noGrp="1"/>
-          </p:cNvSpPr>
-          <p:nvPr>
-            <p:ph type="title"/>
-          </p:nvPr>
-        </p:nvSpPr>
-        <p:spPr/>
-        <p:txBody>
-          <a:bodyPr/>
-          <a:lstStyle/>
-          <a:p>
-            <a:r>
+          <p:cNvPr id="2" name="Rectangle 1"/>
+          <p:cNvSpPr/>
+          <p:nvPr/>
+        </p:nvSpPr>
+        <p:spPr>
+          <a:xfrm>
+            <a:off x="0" y="0"/>
+            <a:ext cx="12191695" cy="1051560"/>
+          </a:xfrm>
+          <a:prstGeom prst="rect">
+            <a:avLst/>
+          </a:prstGeom>
+          <a:solidFill>
+            <a:srgbClr val="003B70"/>
+          </a:solidFill>
+          <a:ln>
+            <a:noFill/>
+          </a:ln>
+          <a:effectLst/>
+        </p:spPr>
+        <p:style>
+          <a:lnRef idx="1">
+            <a:schemeClr val="accent1"/>
+          </a:lnRef>
+          <a:fillRef idx="3">
+            <a:schemeClr val="accent1"/>
+          </a:fillRef>
+          <a:effectRef idx="2">
+            <a:schemeClr val="accent1"/>
+          </a:effectRef>
+          <a:fontRef idx="minor">
+            <a:schemeClr val="lt1"/>
+          </a:fontRef>
+        </p:style>
+        <p:txBody>
+          <a:bodyPr rtlCol="0" anchor="ctr"/>
+          <a:lstStyle/>
+          <a:p>
+            <a:pPr algn="ctr"/>
+          </a:p>
+        </p:txBody>
+      </p:sp>
+      <p:sp>
+        <p:nvSpPr>
+          <p:cNvPr id="3" name="Rectangle 2"/>
+          <p:cNvSpPr/>
+          <p:nvPr/>
+        </p:nvSpPr>
+        <p:spPr>
+          <a:xfrm>
+            <a:off x="0" y="1051560"/>
+            <a:ext cx="2926080" cy="82296"/>
+          </a:xfrm>
+          <a:prstGeom prst="rect">
+            <a:avLst/>
+          </a:prstGeom>
+          <a:solidFill>
+            <a:srgbClr val="C5A059"/>
+          </a:solidFill>
+          <a:ln>
+            <a:noFill/>
+          </a:ln>
+          <a:effectLst/>
+        </p:spPr>
+        <p:style>
+          <a:lnRef idx="1">
+            <a:schemeClr val="accent1"/>
+          </a:lnRef>
+          <a:fillRef idx="3">
+            <a:schemeClr val="accent1"/>
+          </a:fillRef>
+          <a:effectRef idx="2">
+            <a:schemeClr val="accent1"/>
+          </a:effectRef>
+          <a:fontRef idx="minor">
+            <a:schemeClr val="lt1"/>
+          </a:fontRef>
+        </p:style>
+        <p:txBody>
+          <a:bodyPr rtlCol="0" anchor="ctr"/>
+          <a:lstStyle/>
+          <a:p>
+            <a:pPr algn="ctr"/>
+          </a:p>
+        </p:txBody>
+      </p:sp>
+      <p:sp>
+        <p:nvSpPr>
+          <p:cNvPr id="4" name="Rectangle 3"/>
+          <p:cNvSpPr/>
+          <p:nvPr/>
+        </p:nvSpPr>
+        <p:spPr>
+          <a:xfrm>
+            <a:off x="2926080" y="1051560"/>
+            <a:ext cx="9265615" cy="82296"/>
+          </a:xfrm>
+          <a:prstGeom prst="rect">
+            <a:avLst/>
+          </a:prstGeom>
+          <a:solidFill>
+            <a:srgbClr val="6CACE4"/>
+          </a:solidFill>
+          <a:ln>
+            <a:noFill/>
+          </a:ln>
+          <a:effectLst/>
+        </p:spPr>
+        <p:style>
+          <a:lnRef idx="1">
+            <a:schemeClr val="accent1"/>
+          </a:lnRef>
+          <a:fillRef idx="3">
+            <a:schemeClr val="accent1"/>
+          </a:fillRef>
+          <a:effectRef idx="2">
+            <a:schemeClr val="accent1"/>
+          </a:effectRef>
+          <a:fontRef idx="minor">
+            <a:schemeClr val="lt1"/>
+          </a:fontRef>
+        </p:style>
+        <p:txBody>
+          <a:bodyPr rtlCol="0" anchor="ctr"/>
+          <a:lstStyle/>
+          <a:p>
+            <a:pPr algn="ctr"/>
+          </a:p>
+        </p:txBody>
+      </p:sp>
+      <p:sp>
+        <p:nvSpPr>
+          <p:cNvPr id="5" name="TextBox 4"/>
+          <p:cNvSpPr txBox="1"/>
+          <p:nvPr/>
+        </p:nvSpPr>
+        <p:spPr>
+          <a:xfrm>
+            <a:off x="502920" y="0"/>
+            <a:ext cx="11185855" cy="1051560"/>
+          </a:xfrm>
+          <a:prstGeom prst="rect">
+            <a:avLst/>
+          </a:prstGeom>
+          <a:noFill/>
+        </p:spPr>
+        <p:txBody>
+          <a:bodyPr wrap="square" anchor="ctr">
+            <a:spAutoFit/>
+          </a:bodyPr>
+          <a:lstStyle/>
+          <a:p>
+            <a:r>
+              <a:rPr sz="2800" b="1">
+                <a:solidFill>
+                  <a:srgbClr val="FFFFFF"/>
+                </a:solidFill>
+              </a:rPr>
               <a:t>Conclusion</a:t>
             </a:r>
           </a:p>
@@ -3600,48 +5338,226 @@
       </p:sp>
       <p:sp>
         <p:nvSpPr>
-          <p:cNvPr id="3" name="Content Placeholder 2"/>
-          <p:cNvSpPr>
-            <a:spLocks noGrp="1"/>
-          </p:cNvSpPr>
-          <p:nvPr>
-            <p:ph idx="1"/>
-          </p:nvPr>
-        </p:nvSpPr>
-        <p:spPr/>
-        <p:txBody>
-          <a:bodyPr/>
+          <p:cNvPr id="6" name="TextBox 5"/>
+          <p:cNvSpPr txBox="1"/>
+          <p:nvPr/>
+        </p:nvSpPr>
+        <p:spPr>
+          <a:xfrm>
+            <a:off x="640080" y="1554480"/>
+            <a:ext cx="10972800" cy="4663440"/>
+          </a:xfrm>
+          <a:prstGeom prst="rect">
+            <a:avLst/>
+          </a:prstGeom>
+          <a:noFill/>
+        </p:spPr>
+        <p:txBody>
+          <a:bodyPr wrap="square" anchor="t">
+            <a:spAutoFit/>
+          </a:bodyPr>
           <a:lstStyle/>
           <a:p>
             <a:pPr>
-              <a:defRPr sz="2200"/>
+              <a:spcAft>
+                <a:spcPts val="1000"/>
+              </a:spcAft>
             </a:pPr>
             <a:r>
+              <a:rPr sz="2000">
+                <a:solidFill>
+                  <a:srgbClr val="C5A059"/>
+                </a:solidFill>
+              </a:rPr>
+              <a:t>●  </a:t>
+            </a:r>
+            <a:r>
+              <a:rPr sz="2000" b="1">
+                <a:solidFill>
+                  <a:srgbClr val="003B70"/>
+                </a:solidFill>
+              </a:rPr>
               <a:t>A clean, reproducible workflow from Kaggle data to an interpretable model.</a:t>
             </a:r>
           </a:p>
           <a:p>
             <a:pPr>
-              <a:defRPr sz="2200"/>
+              <a:spcAft>
+                <a:spcPts val="1000"/>
+              </a:spcAft>
             </a:pPr>
             <a:r>
+              <a:rPr sz="2000">
+                <a:solidFill>
+                  <a:srgbClr val="C5A059"/>
+                </a:solidFill>
+              </a:rPr>
+              <a:t>●  </a:t>
+            </a:r>
+            <a:r>
+              <a:rPr sz="2000" b="1">
+                <a:solidFill>
+                  <a:srgbClr val="003B70"/>
+                </a:solidFill>
+              </a:rPr>
               <a:t>Methods grounded in the AAI-500 curriculum (Ch 1–7).</a:t>
             </a:r>
           </a:p>
           <a:p>
             <a:pPr>
-              <a:defRPr sz="2200"/>
+              <a:spcAft>
+                <a:spcPts val="1000"/>
+              </a:spcAft>
             </a:pPr>
             <a:r>
+              <a:rPr sz="2000">
+                <a:solidFill>
+                  <a:srgbClr val="C5A059"/>
+                </a:solidFill>
+              </a:rPr>
+              <a:t>●  </a:t>
+            </a:r>
+            <a:r>
+              <a:rPr sz="2000" b="1">
+                <a:solidFill>
+                  <a:srgbClr val="003B70"/>
+                </a:solidFill>
+              </a:rPr>
               <a:t>Adherence, BNP, and age are the most informative readmission factors.</a:t>
             </a:r>
           </a:p>
           <a:p>
             <a:pPr>
-              <a:defRPr sz="2200"/>
+              <a:spcAft>
+                <a:spcPts val="1000"/>
+              </a:spcAft>
             </a:pPr>
             <a:r>
+              <a:rPr sz="2000">
+                <a:solidFill>
+                  <a:srgbClr val="C5A059"/>
+                </a:solidFill>
+              </a:rPr>
+              <a:t>●  </a:t>
+            </a:r>
+            <a:r>
+              <a:rPr sz="2000" b="1">
+                <a:solidFill>
+                  <a:srgbClr val="003B70"/>
+                </a:solidFill>
+              </a:rPr>
               <a:t>Thank you — questions?</a:t>
+            </a:r>
+          </a:p>
+        </p:txBody>
+      </p:sp>
+      <p:sp>
+        <p:nvSpPr>
+          <p:cNvPr id="7" name="Rectangle 6"/>
+          <p:cNvSpPr/>
+          <p:nvPr/>
+        </p:nvSpPr>
+        <p:spPr>
+          <a:xfrm>
+            <a:off x="502920" y="6419088"/>
+            <a:ext cx="11185855" cy="15240"/>
+          </a:xfrm>
+          <a:prstGeom prst="rect">
+            <a:avLst/>
+          </a:prstGeom>
+          <a:solidFill>
+            <a:srgbClr val="6CACE4"/>
+          </a:solidFill>
+          <a:ln>
+            <a:noFill/>
+          </a:ln>
+          <a:effectLst/>
+        </p:spPr>
+        <p:style>
+          <a:lnRef idx="1">
+            <a:schemeClr val="accent1"/>
+          </a:lnRef>
+          <a:fillRef idx="3">
+            <a:schemeClr val="accent1"/>
+          </a:fillRef>
+          <a:effectRef idx="2">
+            <a:schemeClr val="accent1"/>
+          </a:effectRef>
+          <a:fontRef idx="minor">
+            <a:schemeClr val="lt1"/>
+          </a:fontRef>
+        </p:style>
+        <p:txBody>
+          <a:bodyPr rtlCol="0" anchor="ctr"/>
+          <a:lstStyle/>
+          <a:p>
+            <a:pPr algn="ctr"/>
+          </a:p>
+        </p:txBody>
+      </p:sp>
+      <p:sp>
+        <p:nvSpPr>
+          <p:cNvPr id="8" name="TextBox 7"/>
+          <p:cNvSpPr txBox="1"/>
+          <p:nvPr/>
+        </p:nvSpPr>
+        <p:spPr>
+          <a:xfrm>
+            <a:off x="502920" y="6455664"/>
+            <a:ext cx="8229600" cy="320040"/>
+          </a:xfrm>
+          <a:prstGeom prst="rect">
+            <a:avLst/>
+          </a:prstGeom>
+          <a:noFill/>
+        </p:spPr>
+        <p:txBody>
+          <a:bodyPr wrap="square" anchor="t">
+            <a:spAutoFit/>
+          </a:bodyPr>
+          <a:lstStyle/>
+          <a:p>
+            <a:r>
+              <a:rPr sz="1000">
+                <a:solidFill>
+                  <a:srgbClr val="54585A"/>
+                </a:solidFill>
+              </a:rPr>
+              <a:t>University of San Diego · Shiley-Marcos School of Engineering</a:t>
+            </a:r>
+          </a:p>
+        </p:txBody>
+      </p:sp>
+      <p:sp>
+        <p:nvSpPr>
+          <p:cNvPr id="9" name="TextBox 8"/>
+          <p:cNvSpPr txBox="1"/>
+          <p:nvPr/>
+        </p:nvSpPr>
+        <p:spPr>
+          <a:xfrm>
+            <a:off x="10911535" y="6455664"/>
+            <a:ext cx="777240" cy="320040"/>
+          </a:xfrm>
+          <a:prstGeom prst="rect">
+            <a:avLst/>
+          </a:prstGeom>
+          <a:noFill/>
+        </p:spPr>
+        <p:txBody>
+          <a:bodyPr wrap="square" anchor="t">
+            <a:spAutoFit/>
+          </a:bodyPr>
+          <a:lstStyle/>
+          <a:p>
+            <a:pPr algn="r"/>
+            <a:r>
+              <a:rPr sz="1100" b="1">
+                <a:solidFill>
+                  <a:srgbClr val="003B70"/>
+                </a:solidFill>
+              </a:rPr>
+              <a:t>13</a:t>
             </a:r>
           </a:p>
         </p:txBody>
@@ -3657,6 +5573,14 @@
 <file path=ppt/slides/slide2.xml><?xml version="1.0" encoding="utf-8"?>
 <p:sld xmlns:a="http://schemas.openxmlformats.org/drawingml/2006/main" xmlns:p="http://schemas.openxmlformats.org/presentationml/2006/main" xmlns:r="http://schemas.openxmlformats.org/officeDocument/2006/relationships">
   <p:cSld>
+    <p:bg>
+      <p:bgPr>
+        <a:solidFill>
+          <a:srgbClr val="FFFFFF"/>
+        </a:solidFill>
+        <a:effectLst/>
+      </p:bgPr>
+    </p:bg>
     <p:spTree>
       <p:nvGrpSpPr>
         <p:cNvPr id="1" name=""/>
@@ -3666,20 +5590,164 @@
       <p:grpSpPr/>
       <p:sp>
         <p:nvSpPr>
-          <p:cNvPr id="2" name="Title 1"/>
-          <p:cNvSpPr>
-            <a:spLocks noGrp="1"/>
-          </p:cNvSpPr>
-          <p:nvPr>
-            <p:ph type="title"/>
-          </p:nvPr>
-        </p:nvSpPr>
-        <p:spPr/>
-        <p:txBody>
-          <a:bodyPr/>
-          <a:lstStyle/>
-          <a:p>
-            <a:r>
+          <p:cNvPr id="2" name="Rectangle 1"/>
+          <p:cNvSpPr/>
+          <p:nvPr/>
+        </p:nvSpPr>
+        <p:spPr>
+          <a:xfrm>
+            <a:off x="0" y="0"/>
+            <a:ext cx="12191695" cy="1051560"/>
+          </a:xfrm>
+          <a:prstGeom prst="rect">
+            <a:avLst/>
+          </a:prstGeom>
+          <a:solidFill>
+            <a:srgbClr val="003B70"/>
+          </a:solidFill>
+          <a:ln>
+            <a:noFill/>
+          </a:ln>
+          <a:effectLst/>
+        </p:spPr>
+        <p:style>
+          <a:lnRef idx="1">
+            <a:schemeClr val="accent1"/>
+          </a:lnRef>
+          <a:fillRef idx="3">
+            <a:schemeClr val="accent1"/>
+          </a:fillRef>
+          <a:effectRef idx="2">
+            <a:schemeClr val="accent1"/>
+          </a:effectRef>
+          <a:fontRef idx="minor">
+            <a:schemeClr val="lt1"/>
+          </a:fontRef>
+        </p:style>
+        <p:txBody>
+          <a:bodyPr rtlCol="0" anchor="ctr"/>
+          <a:lstStyle/>
+          <a:p>
+            <a:pPr algn="ctr"/>
+          </a:p>
+        </p:txBody>
+      </p:sp>
+      <p:sp>
+        <p:nvSpPr>
+          <p:cNvPr id="3" name="Rectangle 2"/>
+          <p:cNvSpPr/>
+          <p:nvPr/>
+        </p:nvSpPr>
+        <p:spPr>
+          <a:xfrm>
+            <a:off x="0" y="1051560"/>
+            <a:ext cx="2926080" cy="82296"/>
+          </a:xfrm>
+          <a:prstGeom prst="rect">
+            <a:avLst/>
+          </a:prstGeom>
+          <a:solidFill>
+            <a:srgbClr val="C5A059"/>
+          </a:solidFill>
+          <a:ln>
+            <a:noFill/>
+          </a:ln>
+          <a:effectLst/>
+        </p:spPr>
+        <p:style>
+          <a:lnRef idx="1">
+            <a:schemeClr val="accent1"/>
+          </a:lnRef>
+          <a:fillRef idx="3">
+            <a:schemeClr val="accent1"/>
+          </a:fillRef>
+          <a:effectRef idx="2">
+            <a:schemeClr val="accent1"/>
+          </a:effectRef>
+          <a:fontRef idx="minor">
+            <a:schemeClr val="lt1"/>
+          </a:fontRef>
+        </p:style>
+        <p:txBody>
+          <a:bodyPr rtlCol="0" anchor="ctr"/>
+          <a:lstStyle/>
+          <a:p>
+            <a:pPr algn="ctr"/>
+          </a:p>
+        </p:txBody>
+      </p:sp>
+      <p:sp>
+        <p:nvSpPr>
+          <p:cNvPr id="4" name="Rectangle 3"/>
+          <p:cNvSpPr/>
+          <p:nvPr/>
+        </p:nvSpPr>
+        <p:spPr>
+          <a:xfrm>
+            <a:off x="2926080" y="1051560"/>
+            <a:ext cx="9265615" cy="82296"/>
+          </a:xfrm>
+          <a:prstGeom prst="rect">
+            <a:avLst/>
+          </a:prstGeom>
+          <a:solidFill>
+            <a:srgbClr val="6CACE4"/>
+          </a:solidFill>
+          <a:ln>
+            <a:noFill/>
+          </a:ln>
+          <a:effectLst/>
+        </p:spPr>
+        <p:style>
+          <a:lnRef idx="1">
+            <a:schemeClr val="accent1"/>
+          </a:lnRef>
+          <a:fillRef idx="3">
+            <a:schemeClr val="accent1"/>
+          </a:fillRef>
+          <a:effectRef idx="2">
+            <a:schemeClr val="accent1"/>
+          </a:effectRef>
+          <a:fontRef idx="minor">
+            <a:schemeClr val="lt1"/>
+          </a:fontRef>
+        </p:style>
+        <p:txBody>
+          <a:bodyPr rtlCol="0" anchor="ctr"/>
+          <a:lstStyle/>
+          <a:p>
+            <a:pPr algn="ctr"/>
+          </a:p>
+        </p:txBody>
+      </p:sp>
+      <p:sp>
+        <p:nvSpPr>
+          <p:cNvPr id="5" name="TextBox 4"/>
+          <p:cNvSpPr txBox="1"/>
+          <p:nvPr/>
+        </p:nvSpPr>
+        <p:spPr>
+          <a:xfrm>
+            <a:off x="502920" y="0"/>
+            <a:ext cx="11185855" cy="1051560"/>
+          </a:xfrm>
+          <a:prstGeom prst="rect">
+            <a:avLst/>
+          </a:prstGeom>
+          <a:noFill/>
+        </p:spPr>
+        <p:txBody>
+          <a:bodyPr wrap="square" anchor="ctr">
+            <a:spAutoFit/>
+          </a:bodyPr>
+          <a:lstStyle/>
+          <a:p>
+            <a:r>
+              <a:rPr sz="2800" b="1">
+                <a:solidFill>
+                  <a:srgbClr val="FFFFFF"/>
+                </a:solidFill>
+              </a:rPr>
               <a:t>Problem &amp; Objectives</a:t>
             </a:r>
           </a:p>
@@ -3687,72 +5755,295 @@
       </p:sp>
       <p:sp>
         <p:nvSpPr>
-          <p:cNvPr id="3" name="Content Placeholder 2"/>
-          <p:cNvSpPr>
-            <a:spLocks noGrp="1"/>
-          </p:cNvSpPr>
-          <p:nvPr>
-            <p:ph idx="1"/>
-          </p:nvPr>
-        </p:nvSpPr>
-        <p:spPr/>
-        <p:txBody>
-          <a:bodyPr/>
+          <p:cNvPr id="6" name="TextBox 5"/>
+          <p:cNvSpPr txBox="1"/>
+          <p:nvPr/>
+        </p:nvSpPr>
+        <p:spPr>
+          <a:xfrm>
+            <a:off x="640080" y="1554480"/>
+            <a:ext cx="10972800" cy="4663440"/>
+          </a:xfrm>
+          <a:prstGeom prst="rect">
+            <a:avLst/>
+          </a:prstGeom>
+          <a:noFill/>
+        </p:spPr>
+        <p:txBody>
+          <a:bodyPr wrap="square" anchor="t">
+            <a:spAutoFit/>
+          </a:bodyPr>
           <a:lstStyle/>
           <a:p>
             <a:pPr>
-              <a:defRPr sz="2200"/>
+              <a:spcAft>
+                <a:spcPts val="1000"/>
+              </a:spcAft>
             </a:pPr>
             <a:r>
+              <a:rPr sz="2000">
+                <a:solidFill>
+                  <a:srgbClr val="C5A059"/>
+                </a:solidFill>
+              </a:rPr>
+              <a:t>●  </a:t>
+            </a:r>
+            <a:r>
+              <a:rPr sz="2000" b="1">
+                <a:solidFill>
+                  <a:srgbClr val="003B70"/>
+                </a:solidFill>
+              </a:rPr>
               <a:t>~20% of heart-failure patients are readmitted within 30 days — costly and often preventable.</a:t>
             </a:r>
           </a:p>
           <a:p>
             <a:pPr>
-              <a:defRPr sz="2200"/>
+              <a:spcAft>
+                <a:spcPts val="1000"/>
+              </a:spcAft>
             </a:pPr>
             <a:r>
+              <a:rPr sz="2000">
+                <a:solidFill>
+                  <a:srgbClr val="C5A059"/>
+                </a:solidFill>
+              </a:rPr>
+              <a:t>●  </a:t>
+            </a:r>
+            <a:r>
+              <a:rPr sz="2000" b="1">
+                <a:solidFill>
+                  <a:srgbClr val="003B70"/>
+                </a:solidFill>
+              </a:rPr>
               <a:t>Goal: identify factors associated with 30-day readmission and build a defensible risk model.</a:t>
             </a:r>
           </a:p>
           <a:p>
             <a:pPr>
-              <a:defRPr sz="2200"/>
+              <a:spcAft>
+                <a:spcPts val="1000"/>
+              </a:spcAft>
             </a:pPr>
             <a:r>
-              <a:t>Objectives:</a:t>
+              <a:rPr sz="2000">
+                <a:solidFill>
+                  <a:srgbClr val="C5A059"/>
+                </a:solidFill>
+              </a:rPr>
+              <a:t>●  </a:t>
+            </a:r>
+            <a:r>
+              <a:rPr sz="2000" b="1">
+                <a:solidFill>
+                  <a:srgbClr val="003B70"/>
+                </a:solidFill>
+              </a:rPr>
+              <a:t>Objectives</a:t>
             </a:r>
           </a:p>
           <a:p>
             <a:pPr lvl="1">
-              <a:defRPr sz="1800"/>
+              <a:spcAft>
+                <a:spcPts val="1000"/>
+              </a:spcAft>
             </a:pPr>
             <a:r>
+              <a:rPr sz="1600">
+                <a:solidFill>
+                  <a:srgbClr val="6CACE4"/>
+                </a:solidFill>
+              </a:rPr>
+              <a:t>–  </a:t>
+            </a:r>
+            <a:r>
+              <a:rPr sz="1600" b="0">
+                <a:solidFill>
+                  <a:srgbClr val="54585A"/>
+                </a:solidFill>
+              </a:rPr>
               <a:t>Clean and validate the data</a:t>
             </a:r>
           </a:p>
           <a:p>
             <a:pPr lvl="1">
-              <a:defRPr sz="1800"/>
+              <a:spcAft>
+                <a:spcPts val="1000"/>
+              </a:spcAft>
             </a:pPr>
             <a:r>
+              <a:rPr sz="1600">
+                <a:solidFill>
+                  <a:srgbClr val="6CACE4"/>
+                </a:solidFill>
+              </a:rPr>
+              <a:t>–  </a:t>
+            </a:r>
+            <a:r>
+              <a:rPr sz="1600" b="0">
+                <a:solidFill>
+                  <a:srgbClr val="54585A"/>
+                </a:solidFill>
+              </a:rPr>
               <a:t>Explore distributions and test associations (Ch 1–5)</a:t>
             </a:r>
           </a:p>
           <a:p>
             <a:pPr lvl="1">
-              <a:defRPr sz="1800"/>
+              <a:spcAft>
+                <a:spcPts val="1000"/>
+              </a:spcAft>
             </a:pPr>
             <a:r>
+              <a:rPr sz="1600">
+                <a:solidFill>
+                  <a:srgbClr val="6CACE4"/>
+                </a:solidFill>
+              </a:rPr>
+              <a:t>–  </a:t>
+            </a:r>
+            <a:r>
+              <a:rPr sz="1600" b="0">
+                <a:solidFill>
+                  <a:srgbClr val="54585A"/>
+                </a:solidFill>
+              </a:rPr>
               <a:t>Fit and interpret a logistic-regression model</a:t>
             </a:r>
           </a:p>
           <a:p>
             <a:pPr lvl="1">
-              <a:defRPr sz="1800"/>
+              <a:spcAft>
+                <a:spcPts val="1000"/>
+              </a:spcAft>
             </a:pPr>
             <a:r>
+              <a:rPr sz="1600">
+                <a:solidFill>
+                  <a:srgbClr val="6CACE4"/>
+                </a:solidFill>
+              </a:rPr>
+              <a:t>–  </a:t>
+            </a:r>
+            <a:r>
+              <a:rPr sz="1600" b="0">
+                <a:solidFill>
+                  <a:srgbClr val="54585A"/>
+                </a:solidFill>
+              </a:rPr>
               <a:t>Translate results into recommendations and state limitations</a:t>
+            </a:r>
+          </a:p>
+        </p:txBody>
+      </p:sp>
+      <p:sp>
+        <p:nvSpPr>
+          <p:cNvPr id="7" name="Rectangle 6"/>
+          <p:cNvSpPr/>
+          <p:nvPr/>
+        </p:nvSpPr>
+        <p:spPr>
+          <a:xfrm>
+            <a:off x="502920" y="6419088"/>
+            <a:ext cx="11185855" cy="15240"/>
+          </a:xfrm>
+          <a:prstGeom prst="rect">
+            <a:avLst/>
+          </a:prstGeom>
+          <a:solidFill>
+            <a:srgbClr val="6CACE4"/>
+          </a:solidFill>
+          <a:ln>
+            <a:noFill/>
+          </a:ln>
+          <a:effectLst/>
+        </p:spPr>
+        <p:style>
+          <a:lnRef idx="1">
+            <a:schemeClr val="accent1"/>
+          </a:lnRef>
+          <a:fillRef idx="3">
+            <a:schemeClr val="accent1"/>
+          </a:fillRef>
+          <a:effectRef idx="2">
+            <a:schemeClr val="accent1"/>
+          </a:effectRef>
+          <a:fontRef idx="minor">
+            <a:schemeClr val="lt1"/>
+          </a:fontRef>
+        </p:style>
+        <p:txBody>
+          <a:bodyPr rtlCol="0" anchor="ctr"/>
+          <a:lstStyle/>
+          <a:p>
+            <a:pPr algn="ctr"/>
+          </a:p>
+        </p:txBody>
+      </p:sp>
+      <p:sp>
+        <p:nvSpPr>
+          <p:cNvPr id="8" name="TextBox 7"/>
+          <p:cNvSpPr txBox="1"/>
+          <p:nvPr/>
+        </p:nvSpPr>
+        <p:spPr>
+          <a:xfrm>
+            <a:off x="502920" y="6455664"/>
+            <a:ext cx="8229600" cy="320040"/>
+          </a:xfrm>
+          <a:prstGeom prst="rect">
+            <a:avLst/>
+          </a:prstGeom>
+          <a:noFill/>
+        </p:spPr>
+        <p:txBody>
+          <a:bodyPr wrap="square" anchor="t">
+            <a:spAutoFit/>
+          </a:bodyPr>
+          <a:lstStyle/>
+          <a:p>
+            <a:r>
+              <a:rPr sz="1000">
+                <a:solidFill>
+                  <a:srgbClr val="54585A"/>
+                </a:solidFill>
+              </a:rPr>
+              <a:t>University of San Diego · Shiley-Marcos School of Engineering</a:t>
+            </a:r>
+          </a:p>
+        </p:txBody>
+      </p:sp>
+      <p:sp>
+        <p:nvSpPr>
+          <p:cNvPr id="9" name="TextBox 8"/>
+          <p:cNvSpPr txBox="1"/>
+          <p:nvPr/>
+        </p:nvSpPr>
+        <p:spPr>
+          <a:xfrm>
+            <a:off x="10911535" y="6455664"/>
+            <a:ext cx="777240" cy="320040"/>
+          </a:xfrm>
+          <a:prstGeom prst="rect">
+            <a:avLst/>
+          </a:prstGeom>
+          <a:noFill/>
+        </p:spPr>
+        <p:txBody>
+          <a:bodyPr wrap="square" anchor="t">
+            <a:spAutoFit/>
+          </a:bodyPr>
+          <a:lstStyle/>
+          <a:p>
+            <a:pPr algn="r"/>
+            <a:r>
+              <a:rPr sz="1100" b="1">
+                <a:solidFill>
+                  <a:srgbClr val="003B70"/>
+                </a:solidFill>
+              </a:rPr>
+              <a:t>1</a:t>
             </a:r>
           </a:p>
         </p:txBody>
@@ -3768,6 +6059,14 @@
 <file path=ppt/slides/slide3.xml><?xml version="1.0" encoding="utf-8"?>
 <p:sld xmlns:a="http://schemas.openxmlformats.org/drawingml/2006/main" xmlns:p="http://schemas.openxmlformats.org/presentationml/2006/main" xmlns:r="http://schemas.openxmlformats.org/officeDocument/2006/relationships">
   <p:cSld>
+    <p:bg>
+      <p:bgPr>
+        <a:solidFill>
+          <a:srgbClr val="FFFFFF"/>
+        </a:solidFill>
+        <a:effectLst/>
+      </p:bgPr>
+    </p:bg>
     <p:spTree>
       <p:nvGrpSpPr>
         <p:cNvPr id="1" name=""/>
@@ -3777,20 +6076,164 @@
       <p:grpSpPr/>
       <p:sp>
         <p:nvSpPr>
-          <p:cNvPr id="2" name="Title 1"/>
-          <p:cNvSpPr>
-            <a:spLocks noGrp="1"/>
-          </p:cNvSpPr>
-          <p:nvPr>
-            <p:ph type="title"/>
-          </p:nvPr>
-        </p:nvSpPr>
-        <p:spPr/>
-        <p:txBody>
-          <a:bodyPr/>
-          <a:lstStyle/>
-          <a:p>
-            <a:r>
+          <p:cNvPr id="2" name="Rectangle 1"/>
+          <p:cNvSpPr/>
+          <p:nvPr/>
+        </p:nvSpPr>
+        <p:spPr>
+          <a:xfrm>
+            <a:off x="0" y="0"/>
+            <a:ext cx="12191695" cy="1051560"/>
+          </a:xfrm>
+          <a:prstGeom prst="rect">
+            <a:avLst/>
+          </a:prstGeom>
+          <a:solidFill>
+            <a:srgbClr val="003B70"/>
+          </a:solidFill>
+          <a:ln>
+            <a:noFill/>
+          </a:ln>
+          <a:effectLst/>
+        </p:spPr>
+        <p:style>
+          <a:lnRef idx="1">
+            <a:schemeClr val="accent1"/>
+          </a:lnRef>
+          <a:fillRef idx="3">
+            <a:schemeClr val="accent1"/>
+          </a:fillRef>
+          <a:effectRef idx="2">
+            <a:schemeClr val="accent1"/>
+          </a:effectRef>
+          <a:fontRef idx="minor">
+            <a:schemeClr val="lt1"/>
+          </a:fontRef>
+        </p:style>
+        <p:txBody>
+          <a:bodyPr rtlCol="0" anchor="ctr"/>
+          <a:lstStyle/>
+          <a:p>
+            <a:pPr algn="ctr"/>
+          </a:p>
+        </p:txBody>
+      </p:sp>
+      <p:sp>
+        <p:nvSpPr>
+          <p:cNvPr id="3" name="Rectangle 2"/>
+          <p:cNvSpPr/>
+          <p:nvPr/>
+        </p:nvSpPr>
+        <p:spPr>
+          <a:xfrm>
+            <a:off x="0" y="1051560"/>
+            <a:ext cx="2926080" cy="82296"/>
+          </a:xfrm>
+          <a:prstGeom prst="rect">
+            <a:avLst/>
+          </a:prstGeom>
+          <a:solidFill>
+            <a:srgbClr val="C5A059"/>
+          </a:solidFill>
+          <a:ln>
+            <a:noFill/>
+          </a:ln>
+          <a:effectLst/>
+        </p:spPr>
+        <p:style>
+          <a:lnRef idx="1">
+            <a:schemeClr val="accent1"/>
+          </a:lnRef>
+          <a:fillRef idx="3">
+            <a:schemeClr val="accent1"/>
+          </a:fillRef>
+          <a:effectRef idx="2">
+            <a:schemeClr val="accent1"/>
+          </a:effectRef>
+          <a:fontRef idx="minor">
+            <a:schemeClr val="lt1"/>
+          </a:fontRef>
+        </p:style>
+        <p:txBody>
+          <a:bodyPr rtlCol="0" anchor="ctr"/>
+          <a:lstStyle/>
+          <a:p>
+            <a:pPr algn="ctr"/>
+          </a:p>
+        </p:txBody>
+      </p:sp>
+      <p:sp>
+        <p:nvSpPr>
+          <p:cNvPr id="4" name="Rectangle 3"/>
+          <p:cNvSpPr/>
+          <p:nvPr/>
+        </p:nvSpPr>
+        <p:spPr>
+          <a:xfrm>
+            <a:off x="2926080" y="1051560"/>
+            <a:ext cx="9265615" cy="82296"/>
+          </a:xfrm>
+          <a:prstGeom prst="rect">
+            <a:avLst/>
+          </a:prstGeom>
+          <a:solidFill>
+            <a:srgbClr val="6CACE4"/>
+          </a:solidFill>
+          <a:ln>
+            <a:noFill/>
+          </a:ln>
+          <a:effectLst/>
+        </p:spPr>
+        <p:style>
+          <a:lnRef idx="1">
+            <a:schemeClr val="accent1"/>
+          </a:lnRef>
+          <a:fillRef idx="3">
+            <a:schemeClr val="accent1"/>
+          </a:fillRef>
+          <a:effectRef idx="2">
+            <a:schemeClr val="accent1"/>
+          </a:effectRef>
+          <a:fontRef idx="minor">
+            <a:schemeClr val="lt1"/>
+          </a:fontRef>
+        </p:style>
+        <p:txBody>
+          <a:bodyPr rtlCol="0" anchor="ctr"/>
+          <a:lstStyle/>
+          <a:p>
+            <a:pPr algn="ctr"/>
+          </a:p>
+        </p:txBody>
+      </p:sp>
+      <p:sp>
+        <p:nvSpPr>
+          <p:cNvPr id="5" name="TextBox 4"/>
+          <p:cNvSpPr txBox="1"/>
+          <p:nvPr/>
+        </p:nvSpPr>
+        <p:spPr>
+          <a:xfrm>
+            <a:off x="502920" y="0"/>
+            <a:ext cx="11185855" cy="1051560"/>
+          </a:xfrm>
+          <a:prstGeom prst="rect">
+            <a:avLst/>
+          </a:prstGeom>
+          <a:noFill/>
+        </p:spPr>
+        <p:txBody>
+          <a:bodyPr wrap="square" anchor="ctr">
+            <a:spAutoFit/>
+          </a:bodyPr>
+          <a:lstStyle/>
+          <a:p>
+            <a:r>
+              <a:rPr sz="2800" b="1">
+                <a:solidFill>
+                  <a:srgbClr val="FFFFFF"/>
+                </a:solidFill>
+              </a:rPr>
               <a:t>The Dataset</a:t>
             </a:r>
           </a:p>
@@ -3798,7 +6241,7 @@
       </p:sp>
       <p:pic>
         <p:nvPicPr>
-          <p:cNvPr id="3" name="Picture 2" descr="fig_target_balance.png"/>
+          <p:cNvPr id="6" name="Picture 5" descr="fig_target_balance.png"/>
           <p:cNvPicPr>
             <a:picLocks noChangeAspect="1"/>
           </p:cNvPicPr>
@@ -3812,8 +6255,8 @@
         </p:blipFill>
         <p:spPr>
           <a:xfrm>
-            <a:off x="365760" y="1280160"/>
-            <a:ext cx="7774162" cy="5120640"/>
+            <a:off x="457200" y="1554480"/>
+            <a:ext cx="6948715" cy="4572000"/>
           </a:xfrm>
           <a:prstGeom prst="rect">
             <a:avLst/>
@@ -3822,14 +6265,14 @@
       </p:pic>
       <p:sp>
         <p:nvSpPr>
-          <p:cNvPr id="4" name="TextBox 3"/>
+          <p:cNvPr id="7" name="TextBox 6"/>
           <p:cNvSpPr txBox="1"/>
           <p:nvPr/>
         </p:nvSpPr>
         <p:spPr>
           <a:xfrm>
-            <a:off x="7498079" y="1463040"/>
-            <a:ext cx="4389120" cy="4754880"/>
+            <a:off x="7955279" y="1737360"/>
+            <a:ext cx="3931920" cy="4389120"/>
           </a:xfrm>
           <a:prstGeom prst="rect">
             <a:avLst/>
@@ -3837,56 +6280,257 @@
           <a:noFill/>
         </p:spPr>
         <p:txBody>
-          <a:bodyPr wrap="square">
+          <a:bodyPr wrap="square" anchor="t">
             <a:spAutoFit/>
           </a:bodyPr>
           <a:lstStyle/>
           <a:p>
             <a:pPr>
-              <a:defRPr sz="1800"/>
+              <a:spcAft>
+                <a:spcPts val="1000"/>
+              </a:spcAft>
             </a:pPr>
             <a:r>
+              <a:rPr sz="2000">
+                <a:solidFill>
+                  <a:srgbClr val="C5A059"/>
+                </a:solidFill>
+              </a:rPr>
+              <a:t>●  </a:t>
+            </a:r>
+            <a:r>
+              <a:rPr sz="2000" b="1">
+                <a:solidFill>
+                  <a:srgbClr val="003B70"/>
+                </a:solidFill>
+              </a:rPr>
               <a:t>Kaggle: Heart Failure Readmission &amp; SDOH</a:t>
             </a:r>
           </a:p>
           <a:p>
             <a:pPr>
-              <a:defRPr sz="1800"/>
+              <a:spcAft>
+                <a:spcPts val="1000"/>
+              </a:spcAft>
             </a:pPr>
             <a:r>
+              <a:rPr sz="2000">
+                <a:solidFill>
+                  <a:srgbClr val="C5A059"/>
+                </a:solidFill>
+              </a:rPr>
+              <a:t>●  </a:t>
+            </a:r>
+            <a:r>
+              <a:rPr sz="2000" b="1">
+                <a:solidFill>
+                  <a:srgbClr val="003B70"/>
+                </a:solidFill>
+              </a:rPr>
               <a:t>3,000 patients × 16 variables</a:t>
             </a:r>
           </a:p>
           <a:p>
             <a:pPr>
-              <a:defRPr sz="1800"/>
+              <a:spcAft>
+                <a:spcPts val="1000"/>
+              </a:spcAft>
             </a:pPr>
             <a:r>
+              <a:rPr sz="2000">
+                <a:solidFill>
+                  <a:srgbClr val="C5A059"/>
+                </a:solidFill>
+              </a:rPr>
+              <a:t>●  </a:t>
+            </a:r>
+            <a:r>
+              <a:rPr sz="2000" b="1">
+                <a:solidFill>
+                  <a:srgbClr val="003B70"/>
+                </a:solidFill>
+              </a:rPr>
               <a:t>Clinical: age, BMI, BNP, sodium, creatinine, BP, heart rate</a:t>
             </a:r>
           </a:p>
           <a:p>
             <a:pPr>
-              <a:defRPr sz="1800"/>
+              <a:spcAft>
+                <a:spcPts val="1000"/>
+              </a:spcAft>
             </a:pPr>
             <a:r>
+              <a:rPr sz="2000">
+                <a:solidFill>
+                  <a:srgbClr val="C5A059"/>
+                </a:solidFill>
+              </a:rPr>
+              <a:t>●  </a:t>
+            </a:r>
+            <a:r>
+              <a:rPr sz="2000" b="1">
+                <a:solidFill>
+                  <a:srgbClr val="003B70"/>
+                </a:solidFill>
+              </a:rPr>
               <a:t>Treatment: ACE inhibitor, beta blocker, diuretic, adherence</a:t>
             </a:r>
           </a:p>
           <a:p>
             <a:pPr>
-              <a:defRPr sz="1800"/>
+              <a:spcAft>
+                <a:spcPts val="1000"/>
+              </a:spcAft>
             </a:pPr>
             <a:r>
+              <a:rPr sz="2000">
+                <a:solidFill>
+                  <a:srgbClr val="C5A059"/>
+                </a:solidFill>
+              </a:rPr>
+              <a:t>●  </a:t>
+            </a:r>
+            <a:r>
+              <a:rPr sz="2000" b="1">
+                <a:solidFill>
+                  <a:srgbClr val="003B70"/>
+                </a:solidFill>
+              </a:rPr>
               <a:t>Social: income level, distance to hospital</a:t>
             </a:r>
           </a:p>
           <a:p>
             <a:pPr>
-              <a:defRPr sz="1800"/>
+              <a:spcAft>
+                <a:spcPts val="1000"/>
+              </a:spcAft>
             </a:pPr>
             <a:r>
+              <a:rPr sz="2000">
+                <a:solidFill>
+                  <a:srgbClr val="C5A059"/>
+                </a:solidFill>
+              </a:rPr>
+              <a:t>●  </a:t>
+            </a:r>
+            <a:r>
+              <a:rPr sz="2000" b="1">
+                <a:solidFill>
+                  <a:srgbClr val="003B70"/>
+                </a:solidFill>
+              </a:rPr>
               <a:t>Target: readmitted_30d (41.1% positive)</a:t>
+            </a:r>
+          </a:p>
+        </p:txBody>
+      </p:sp>
+      <p:sp>
+        <p:nvSpPr>
+          <p:cNvPr id="8" name="Rectangle 7"/>
+          <p:cNvSpPr/>
+          <p:nvPr/>
+        </p:nvSpPr>
+        <p:spPr>
+          <a:xfrm>
+            <a:off x="502920" y="6419088"/>
+            <a:ext cx="11185855" cy="15240"/>
+          </a:xfrm>
+          <a:prstGeom prst="rect">
+            <a:avLst/>
+          </a:prstGeom>
+          <a:solidFill>
+            <a:srgbClr val="6CACE4"/>
+          </a:solidFill>
+          <a:ln>
+            <a:noFill/>
+          </a:ln>
+          <a:effectLst/>
+        </p:spPr>
+        <p:style>
+          <a:lnRef idx="1">
+            <a:schemeClr val="accent1"/>
+          </a:lnRef>
+          <a:fillRef idx="3">
+            <a:schemeClr val="accent1"/>
+          </a:fillRef>
+          <a:effectRef idx="2">
+            <a:schemeClr val="accent1"/>
+          </a:effectRef>
+          <a:fontRef idx="minor">
+            <a:schemeClr val="lt1"/>
+          </a:fontRef>
+        </p:style>
+        <p:txBody>
+          <a:bodyPr rtlCol="0" anchor="ctr"/>
+          <a:lstStyle/>
+          <a:p>
+            <a:pPr algn="ctr"/>
+          </a:p>
+        </p:txBody>
+      </p:sp>
+      <p:sp>
+        <p:nvSpPr>
+          <p:cNvPr id="9" name="TextBox 8"/>
+          <p:cNvSpPr txBox="1"/>
+          <p:nvPr/>
+        </p:nvSpPr>
+        <p:spPr>
+          <a:xfrm>
+            <a:off x="502920" y="6455664"/>
+            <a:ext cx="8229600" cy="320040"/>
+          </a:xfrm>
+          <a:prstGeom prst="rect">
+            <a:avLst/>
+          </a:prstGeom>
+          <a:noFill/>
+        </p:spPr>
+        <p:txBody>
+          <a:bodyPr wrap="square" anchor="t">
+            <a:spAutoFit/>
+          </a:bodyPr>
+          <a:lstStyle/>
+          <a:p>
+            <a:r>
+              <a:rPr sz="1000">
+                <a:solidFill>
+                  <a:srgbClr val="54585A"/>
+                </a:solidFill>
+              </a:rPr>
+              <a:t>University of San Diego · Shiley-Marcos School of Engineering</a:t>
+            </a:r>
+          </a:p>
+        </p:txBody>
+      </p:sp>
+      <p:sp>
+        <p:nvSpPr>
+          <p:cNvPr id="10" name="TextBox 9"/>
+          <p:cNvSpPr txBox="1"/>
+          <p:nvPr/>
+        </p:nvSpPr>
+        <p:spPr>
+          <a:xfrm>
+            <a:off x="10911535" y="6455664"/>
+            <a:ext cx="777240" cy="320040"/>
+          </a:xfrm>
+          <a:prstGeom prst="rect">
+            <a:avLst/>
+          </a:prstGeom>
+          <a:noFill/>
+        </p:spPr>
+        <p:txBody>
+          <a:bodyPr wrap="square" anchor="t">
+            <a:spAutoFit/>
+          </a:bodyPr>
+          <a:lstStyle/>
+          <a:p>
+            <a:pPr algn="r"/>
+            <a:r>
+              <a:rPr sz="1100" b="1">
+                <a:solidFill>
+                  <a:srgbClr val="003B70"/>
+                </a:solidFill>
+              </a:rPr>
+              <a:t>2</a:t>
             </a:r>
           </a:p>
         </p:txBody>
@@ -3902,6 +6546,14 @@
 <file path=ppt/slides/slide4.xml><?xml version="1.0" encoding="utf-8"?>
 <p:sld xmlns:a="http://schemas.openxmlformats.org/drawingml/2006/main" xmlns:p="http://schemas.openxmlformats.org/presentationml/2006/main" xmlns:r="http://schemas.openxmlformats.org/officeDocument/2006/relationships">
   <p:cSld>
+    <p:bg>
+      <p:bgPr>
+        <a:solidFill>
+          <a:srgbClr val="FFFFFF"/>
+        </a:solidFill>
+        <a:effectLst/>
+      </p:bgPr>
+    </p:bg>
     <p:spTree>
       <p:nvGrpSpPr>
         <p:cNvPr id="1" name=""/>
@@ -3911,20 +6563,164 @@
       <p:grpSpPr/>
       <p:sp>
         <p:nvSpPr>
-          <p:cNvPr id="2" name="Title 1"/>
-          <p:cNvSpPr>
-            <a:spLocks noGrp="1"/>
-          </p:cNvSpPr>
-          <p:nvPr>
-            <p:ph type="title"/>
-          </p:nvPr>
-        </p:nvSpPr>
-        <p:spPr/>
-        <p:txBody>
-          <a:bodyPr/>
-          <a:lstStyle/>
-          <a:p>
-            <a:r>
+          <p:cNvPr id="2" name="Rectangle 1"/>
+          <p:cNvSpPr/>
+          <p:nvPr/>
+        </p:nvSpPr>
+        <p:spPr>
+          <a:xfrm>
+            <a:off x="0" y="0"/>
+            <a:ext cx="12191695" cy="1051560"/>
+          </a:xfrm>
+          <a:prstGeom prst="rect">
+            <a:avLst/>
+          </a:prstGeom>
+          <a:solidFill>
+            <a:srgbClr val="003B70"/>
+          </a:solidFill>
+          <a:ln>
+            <a:noFill/>
+          </a:ln>
+          <a:effectLst/>
+        </p:spPr>
+        <p:style>
+          <a:lnRef idx="1">
+            <a:schemeClr val="accent1"/>
+          </a:lnRef>
+          <a:fillRef idx="3">
+            <a:schemeClr val="accent1"/>
+          </a:fillRef>
+          <a:effectRef idx="2">
+            <a:schemeClr val="accent1"/>
+          </a:effectRef>
+          <a:fontRef idx="minor">
+            <a:schemeClr val="lt1"/>
+          </a:fontRef>
+        </p:style>
+        <p:txBody>
+          <a:bodyPr rtlCol="0" anchor="ctr"/>
+          <a:lstStyle/>
+          <a:p>
+            <a:pPr algn="ctr"/>
+          </a:p>
+        </p:txBody>
+      </p:sp>
+      <p:sp>
+        <p:nvSpPr>
+          <p:cNvPr id="3" name="Rectangle 2"/>
+          <p:cNvSpPr/>
+          <p:nvPr/>
+        </p:nvSpPr>
+        <p:spPr>
+          <a:xfrm>
+            <a:off x="0" y="1051560"/>
+            <a:ext cx="2926080" cy="82296"/>
+          </a:xfrm>
+          <a:prstGeom prst="rect">
+            <a:avLst/>
+          </a:prstGeom>
+          <a:solidFill>
+            <a:srgbClr val="C5A059"/>
+          </a:solidFill>
+          <a:ln>
+            <a:noFill/>
+          </a:ln>
+          <a:effectLst/>
+        </p:spPr>
+        <p:style>
+          <a:lnRef idx="1">
+            <a:schemeClr val="accent1"/>
+          </a:lnRef>
+          <a:fillRef idx="3">
+            <a:schemeClr val="accent1"/>
+          </a:fillRef>
+          <a:effectRef idx="2">
+            <a:schemeClr val="accent1"/>
+          </a:effectRef>
+          <a:fontRef idx="minor">
+            <a:schemeClr val="lt1"/>
+          </a:fontRef>
+        </p:style>
+        <p:txBody>
+          <a:bodyPr rtlCol="0" anchor="ctr"/>
+          <a:lstStyle/>
+          <a:p>
+            <a:pPr algn="ctr"/>
+          </a:p>
+        </p:txBody>
+      </p:sp>
+      <p:sp>
+        <p:nvSpPr>
+          <p:cNvPr id="4" name="Rectangle 3"/>
+          <p:cNvSpPr/>
+          <p:nvPr/>
+        </p:nvSpPr>
+        <p:spPr>
+          <a:xfrm>
+            <a:off x="2926080" y="1051560"/>
+            <a:ext cx="9265615" cy="82296"/>
+          </a:xfrm>
+          <a:prstGeom prst="rect">
+            <a:avLst/>
+          </a:prstGeom>
+          <a:solidFill>
+            <a:srgbClr val="6CACE4"/>
+          </a:solidFill>
+          <a:ln>
+            <a:noFill/>
+          </a:ln>
+          <a:effectLst/>
+        </p:spPr>
+        <p:style>
+          <a:lnRef idx="1">
+            <a:schemeClr val="accent1"/>
+          </a:lnRef>
+          <a:fillRef idx="3">
+            <a:schemeClr val="accent1"/>
+          </a:fillRef>
+          <a:effectRef idx="2">
+            <a:schemeClr val="accent1"/>
+          </a:effectRef>
+          <a:fontRef idx="minor">
+            <a:schemeClr val="lt1"/>
+          </a:fontRef>
+        </p:style>
+        <p:txBody>
+          <a:bodyPr rtlCol="0" anchor="ctr"/>
+          <a:lstStyle/>
+          <a:p>
+            <a:pPr algn="ctr"/>
+          </a:p>
+        </p:txBody>
+      </p:sp>
+      <p:sp>
+        <p:nvSpPr>
+          <p:cNvPr id="5" name="TextBox 4"/>
+          <p:cNvSpPr txBox="1"/>
+          <p:nvPr/>
+        </p:nvSpPr>
+        <p:spPr>
+          <a:xfrm>
+            <a:off x="502920" y="0"/>
+            <a:ext cx="11185855" cy="1051560"/>
+          </a:xfrm>
+          <a:prstGeom prst="rect">
+            <a:avLst/>
+          </a:prstGeom>
+          <a:noFill/>
+        </p:spPr>
+        <p:txBody>
+          <a:bodyPr wrap="square" anchor="ctr">
+            <a:spAutoFit/>
+          </a:bodyPr>
+          <a:lstStyle/>
+          <a:p>
+            <a:r>
+              <a:rPr sz="2800" b="1">
+                <a:solidFill>
+                  <a:srgbClr val="FFFFFF"/>
+                </a:solidFill>
+              </a:rPr>
               <a:t>Data Quality &amp; Cleaning</a:t>
             </a:r>
           </a:p>
@@ -3932,56 +6728,249 @@
       </p:sp>
       <p:sp>
         <p:nvSpPr>
-          <p:cNvPr id="3" name="Content Placeholder 2"/>
-          <p:cNvSpPr>
-            <a:spLocks noGrp="1"/>
-          </p:cNvSpPr>
-          <p:nvPr>
-            <p:ph idx="1"/>
-          </p:nvPr>
-        </p:nvSpPr>
-        <p:spPr/>
-        <p:txBody>
-          <a:bodyPr/>
+          <p:cNvPr id="6" name="TextBox 5"/>
+          <p:cNvSpPr txBox="1"/>
+          <p:nvPr/>
+        </p:nvSpPr>
+        <p:spPr>
+          <a:xfrm>
+            <a:off x="640080" y="1554480"/>
+            <a:ext cx="10972800" cy="4663440"/>
+          </a:xfrm>
+          <a:prstGeom prst="rect">
+            <a:avLst/>
+          </a:prstGeom>
+          <a:noFill/>
+        </p:spPr>
+        <p:txBody>
+          <a:bodyPr wrap="square" anchor="t">
+            <a:spAutoFit/>
+          </a:bodyPr>
           <a:lstStyle/>
           <a:p>
             <a:pPr>
-              <a:defRPr sz="2200"/>
+              <a:spcAft>
+                <a:spcPts val="1000"/>
+              </a:spcAft>
             </a:pPr>
             <a:r>
+              <a:rPr sz="2000">
+                <a:solidFill>
+                  <a:srgbClr val="C5A059"/>
+                </a:solidFill>
+              </a:rPr>
+              <a:t>●  </a:t>
+            </a:r>
+            <a:r>
+              <a:rPr sz="2000" b="1">
+                <a:solidFill>
+                  <a:srgbClr val="003B70"/>
+                </a:solidFill>
+              </a:rPr>
               <a:t>~3% missing values in BMI, sodium, and creatinine.</a:t>
             </a:r>
           </a:p>
           <a:p>
             <a:pPr>
-              <a:defRPr sz="2200"/>
+              <a:spcAft>
+                <a:spcPts val="1000"/>
+              </a:spcAft>
             </a:pPr>
             <a:r>
+              <a:rPr sz="2000">
+                <a:solidFill>
+                  <a:srgbClr val="C5A059"/>
+                </a:solidFill>
+              </a:rPr>
+              <a:t>●  </a:t>
+            </a:r>
+            <a:r>
+              <a:rPr sz="2000" b="1">
+                <a:solidFill>
+                  <a:srgbClr val="003B70"/>
+                </a:solidFill>
+              </a:rPr>
               <a:t>Impossible negative creatinine values (18 rows) and a few extreme outliers.</a:t>
             </a:r>
           </a:p>
           <a:p>
             <a:pPr>
-              <a:defRPr sz="2200"/>
+              <a:spcAft>
+                <a:spcPts val="1000"/>
+              </a:spcAft>
             </a:pPr>
             <a:r>
-              <a:t>Cleaning: out-of-range readings set to NaN using clinically plausible ranges.</a:t>
+              <a:rPr sz="2000">
+                <a:solidFill>
+                  <a:srgbClr val="C5A059"/>
+                </a:solidFill>
+              </a:rPr>
+              <a:t>●  </a:t>
+            </a:r>
+            <a:r>
+              <a:rPr sz="2000" b="1">
+                <a:solidFill>
+                  <a:srgbClr val="003B70"/>
+                </a:solidFill>
+              </a:rPr>
+              <a:t>Out-of-range readings set to NaN using clinically plausible ranges.</a:t>
             </a:r>
           </a:p>
           <a:p>
             <a:pPr>
-              <a:defRPr sz="2200"/>
+              <a:spcAft>
+                <a:spcPts val="1000"/>
+              </a:spcAft>
             </a:pPr>
             <a:r>
+              <a:rPr sz="2000">
+                <a:solidFill>
+                  <a:srgbClr val="C5A059"/>
+                </a:solidFill>
+              </a:rPr>
+              <a:t>●  </a:t>
+            </a:r>
+            <a:r>
+              <a:rPr sz="2000" b="1">
+                <a:solidFill>
+                  <a:srgbClr val="003B70"/>
+                </a:solidFill>
+              </a:rPr>
               <a:t>Modeling uses complete-case analysis (no imputation — outside course scope).</a:t>
             </a:r>
           </a:p>
           <a:p>
             <a:pPr>
-              <a:defRPr sz="2200"/>
+              <a:spcAft>
+                <a:spcPts val="1000"/>
+              </a:spcAft>
             </a:pPr>
             <a:r>
+              <a:rPr sz="2000">
+                <a:solidFill>
+                  <a:srgbClr val="C5A059"/>
+                </a:solidFill>
+              </a:rPr>
+              <a:t>●  </a:t>
+            </a:r>
+            <a:r>
+              <a:rPr sz="2000" b="1">
+                <a:solidFill>
+                  <a:srgbClr val="003B70"/>
+                </a:solidFill>
+              </a:rPr>
               <a:t>No duplicate rows; patient_id excluded as an identifier.</a:t>
+            </a:r>
+          </a:p>
+        </p:txBody>
+      </p:sp>
+      <p:sp>
+        <p:nvSpPr>
+          <p:cNvPr id="7" name="Rectangle 6"/>
+          <p:cNvSpPr/>
+          <p:nvPr/>
+        </p:nvSpPr>
+        <p:spPr>
+          <a:xfrm>
+            <a:off x="502920" y="6419088"/>
+            <a:ext cx="11185855" cy="15240"/>
+          </a:xfrm>
+          <a:prstGeom prst="rect">
+            <a:avLst/>
+          </a:prstGeom>
+          <a:solidFill>
+            <a:srgbClr val="6CACE4"/>
+          </a:solidFill>
+          <a:ln>
+            <a:noFill/>
+          </a:ln>
+          <a:effectLst/>
+        </p:spPr>
+        <p:style>
+          <a:lnRef idx="1">
+            <a:schemeClr val="accent1"/>
+          </a:lnRef>
+          <a:fillRef idx="3">
+            <a:schemeClr val="accent1"/>
+          </a:fillRef>
+          <a:effectRef idx="2">
+            <a:schemeClr val="accent1"/>
+          </a:effectRef>
+          <a:fontRef idx="minor">
+            <a:schemeClr val="lt1"/>
+          </a:fontRef>
+        </p:style>
+        <p:txBody>
+          <a:bodyPr rtlCol="0" anchor="ctr"/>
+          <a:lstStyle/>
+          <a:p>
+            <a:pPr algn="ctr"/>
+          </a:p>
+        </p:txBody>
+      </p:sp>
+      <p:sp>
+        <p:nvSpPr>
+          <p:cNvPr id="8" name="TextBox 7"/>
+          <p:cNvSpPr txBox="1"/>
+          <p:nvPr/>
+        </p:nvSpPr>
+        <p:spPr>
+          <a:xfrm>
+            <a:off x="502920" y="6455664"/>
+            <a:ext cx="8229600" cy="320040"/>
+          </a:xfrm>
+          <a:prstGeom prst="rect">
+            <a:avLst/>
+          </a:prstGeom>
+          <a:noFill/>
+        </p:spPr>
+        <p:txBody>
+          <a:bodyPr wrap="square" anchor="t">
+            <a:spAutoFit/>
+          </a:bodyPr>
+          <a:lstStyle/>
+          <a:p>
+            <a:r>
+              <a:rPr sz="1000">
+                <a:solidFill>
+                  <a:srgbClr val="54585A"/>
+                </a:solidFill>
+              </a:rPr>
+              <a:t>University of San Diego · Shiley-Marcos School of Engineering</a:t>
+            </a:r>
+          </a:p>
+        </p:txBody>
+      </p:sp>
+      <p:sp>
+        <p:nvSpPr>
+          <p:cNvPr id="9" name="TextBox 8"/>
+          <p:cNvSpPr txBox="1"/>
+          <p:nvPr/>
+        </p:nvSpPr>
+        <p:spPr>
+          <a:xfrm>
+            <a:off x="10911535" y="6455664"/>
+            <a:ext cx="777240" cy="320040"/>
+          </a:xfrm>
+          <a:prstGeom prst="rect">
+            <a:avLst/>
+          </a:prstGeom>
+          <a:noFill/>
+        </p:spPr>
+        <p:txBody>
+          <a:bodyPr wrap="square" anchor="t">
+            <a:spAutoFit/>
+          </a:bodyPr>
+          <a:lstStyle/>
+          <a:p>
+            <a:pPr algn="r"/>
+            <a:r>
+              <a:rPr sz="1100" b="1">
+                <a:solidFill>
+                  <a:srgbClr val="003B70"/>
+                </a:solidFill>
+              </a:rPr>
+              <a:t>3</a:t>
             </a:r>
           </a:p>
         </p:txBody>
@@ -3997,6 +6986,14 @@
 <file path=ppt/slides/slide5.xml><?xml version="1.0" encoding="utf-8"?>
 <p:sld xmlns:a="http://schemas.openxmlformats.org/drawingml/2006/main" xmlns:p="http://schemas.openxmlformats.org/presentationml/2006/main" xmlns:r="http://schemas.openxmlformats.org/officeDocument/2006/relationships">
   <p:cSld>
+    <p:bg>
+      <p:bgPr>
+        <a:solidFill>
+          <a:srgbClr val="FFFFFF"/>
+        </a:solidFill>
+        <a:effectLst/>
+      </p:bgPr>
+    </p:bg>
     <p:spTree>
       <p:nvGrpSpPr>
         <p:cNvPr id="1" name=""/>
@@ -4006,20 +7003,164 @@
       <p:grpSpPr/>
       <p:sp>
         <p:nvSpPr>
-          <p:cNvPr id="2" name="Title 1"/>
-          <p:cNvSpPr>
-            <a:spLocks noGrp="1"/>
-          </p:cNvSpPr>
-          <p:nvPr>
-            <p:ph type="title"/>
-          </p:nvPr>
-        </p:nvSpPr>
-        <p:spPr/>
-        <p:txBody>
-          <a:bodyPr/>
-          <a:lstStyle/>
-          <a:p>
-            <a:r>
+          <p:cNvPr id="2" name="Rectangle 1"/>
+          <p:cNvSpPr/>
+          <p:nvPr/>
+        </p:nvSpPr>
+        <p:spPr>
+          <a:xfrm>
+            <a:off x="0" y="0"/>
+            <a:ext cx="12191695" cy="1051560"/>
+          </a:xfrm>
+          <a:prstGeom prst="rect">
+            <a:avLst/>
+          </a:prstGeom>
+          <a:solidFill>
+            <a:srgbClr val="003B70"/>
+          </a:solidFill>
+          <a:ln>
+            <a:noFill/>
+          </a:ln>
+          <a:effectLst/>
+        </p:spPr>
+        <p:style>
+          <a:lnRef idx="1">
+            <a:schemeClr val="accent1"/>
+          </a:lnRef>
+          <a:fillRef idx="3">
+            <a:schemeClr val="accent1"/>
+          </a:fillRef>
+          <a:effectRef idx="2">
+            <a:schemeClr val="accent1"/>
+          </a:effectRef>
+          <a:fontRef idx="minor">
+            <a:schemeClr val="lt1"/>
+          </a:fontRef>
+        </p:style>
+        <p:txBody>
+          <a:bodyPr rtlCol="0" anchor="ctr"/>
+          <a:lstStyle/>
+          <a:p>
+            <a:pPr algn="ctr"/>
+          </a:p>
+        </p:txBody>
+      </p:sp>
+      <p:sp>
+        <p:nvSpPr>
+          <p:cNvPr id="3" name="Rectangle 2"/>
+          <p:cNvSpPr/>
+          <p:nvPr/>
+        </p:nvSpPr>
+        <p:spPr>
+          <a:xfrm>
+            <a:off x="0" y="1051560"/>
+            <a:ext cx="2926080" cy="82296"/>
+          </a:xfrm>
+          <a:prstGeom prst="rect">
+            <a:avLst/>
+          </a:prstGeom>
+          <a:solidFill>
+            <a:srgbClr val="C5A059"/>
+          </a:solidFill>
+          <a:ln>
+            <a:noFill/>
+          </a:ln>
+          <a:effectLst/>
+        </p:spPr>
+        <p:style>
+          <a:lnRef idx="1">
+            <a:schemeClr val="accent1"/>
+          </a:lnRef>
+          <a:fillRef idx="3">
+            <a:schemeClr val="accent1"/>
+          </a:fillRef>
+          <a:effectRef idx="2">
+            <a:schemeClr val="accent1"/>
+          </a:effectRef>
+          <a:fontRef idx="minor">
+            <a:schemeClr val="lt1"/>
+          </a:fontRef>
+        </p:style>
+        <p:txBody>
+          <a:bodyPr rtlCol="0" anchor="ctr"/>
+          <a:lstStyle/>
+          <a:p>
+            <a:pPr algn="ctr"/>
+          </a:p>
+        </p:txBody>
+      </p:sp>
+      <p:sp>
+        <p:nvSpPr>
+          <p:cNvPr id="4" name="Rectangle 3"/>
+          <p:cNvSpPr/>
+          <p:nvPr/>
+        </p:nvSpPr>
+        <p:spPr>
+          <a:xfrm>
+            <a:off x="2926080" y="1051560"/>
+            <a:ext cx="9265615" cy="82296"/>
+          </a:xfrm>
+          <a:prstGeom prst="rect">
+            <a:avLst/>
+          </a:prstGeom>
+          <a:solidFill>
+            <a:srgbClr val="6CACE4"/>
+          </a:solidFill>
+          <a:ln>
+            <a:noFill/>
+          </a:ln>
+          <a:effectLst/>
+        </p:spPr>
+        <p:style>
+          <a:lnRef idx="1">
+            <a:schemeClr val="accent1"/>
+          </a:lnRef>
+          <a:fillRef idx="3">
+            <a:schemeClr val="accent1"/>
+          </a:fillRef>
+          <a:effectRef idx="2">
+            <a:schemeClr val="accent1"/>
+          </a:effectRef>
+          <a:fontRef idx="minor">
+            <a:schemeClr val="lt1"/>
+          </a:fontRef>
+        </p:style>
+        <p:txBody>
+          <a:bodyPr rtlCol="0" anchor="ctr"/>
+          <a:lstStyle/>
+          <a:p>
+            <a:pPr algn="ctr"/>
+          </a:p>
+        </p:txBody>
+      </p:sp>
+      <p:sp>
+        <p:nvSpPr>
+          <p:cNvPr id="5" name="TextBox 4"/>
+          <p:cNvSpPr txBox="1"/>
+          <p:nvPr/>
+        </p:nvSpPr>
+        <p:spPr>
+          <a:xfrm>
+            <a:off x="502920" y="0"/>
+            <a:ext cx="11185855" cy="1051560"/>
+          </a:xfrm>
+          <a:prstGeom prst="rect">
+            <a:avLst/>
+          </a:prstGeom>
+          <a:noFill/>
+        </p:spPr>
+        <p:txBody>
+          <a:bodyPr wrap="square" anchor="ctr">
+            <a:spAutoFit/>
+          </a:bodyPr>
+          <a:lstStyle/>
+          <a:p>
+            <a:r>
+              <a:rPr sz="2800" b="1">
+                <a:solidFill>
+                  <a:srgbClr val="FFFFFF"/>
+                </a:solidFill>
+              </a:rPr>
               <a:t>EDA — Distributions</a:t>
             </a:r>
           </a:p>
@@ -4027,7 +7168,7 @@
       </p:sp>
       <p:pic>
         <p:nvPicPr>
-          <p:cNvPr id="3" name="Picture 2" descr="fig_hist_numeric.png"/>
+          <p:cNvPr id="6" name="Picture 5" descr="fig_hist_numeric.png"/>
           <p:cNvPicPr>
             <a:picLocks noChangeAspect="1"/>
           </p:cNvPicPr>
@@ -4041,8 +7182,8 @@
         </p:blipFill>
         <p:spPr>
           <a:xfrm>
-            <a:off x="365760" y="1280160"/>
-            <a:ext cx="6438825" cy="5120640"/>
+            <a:off x="457200" y="1554480"/>
+            <a:ext cx="5748950" cy="4572000"/>
           </a:xfrm>
           <a:prstGeom prst="rect">
             <a:avLst/>
@@ -4051,14 +7192,14 @@
       </p:pic>
       <p:sp>
         <p:nvSpPr>
-          <p:cNvPr id="4" name="TextBox 3"/>
+          <p:cNvPr id="7" name="TextBox 6"/>
           <p:cNvSpPr txBox="1"/>
           <p:nvPr/>
         </p:nvSpPr>
         <p:spPr>
           <a:xfrm>
-            <a:off x="7498079" y="1463040"/>
-            <a:ext cx="4389120" cy="4754880"/>
+            <a:off x="7955279" y="1737360"/>
+            <a:ext cx="3931920" cy="4389120"/>
           </a:xfrm>
           <a:prstGeom prst="rect">
             <a:avLst/>
@@ -4066,40 +7207,211 @@
           <a:noFill/>
         </p:spPr>
         <p:txBody>
-          <a:bodyPr wrap="square">
+          <a:bodyPr wrap="square" anchor="t">
             <a:spAutoFit/>
           </a:bodyPr>
           <a:lstStyle/>
           <a:p>
             <a:pPr>
-              <a:defRPr sz="1800"/>
+              <a:spcAft>
+                <a:spcPts val="1000"/>
+              </a:spcAft>
             </a:pPr>
             <a:r>
+              <a:rPr sz="2000">
+                <a:solidFill>
+                  <a:srgbClr val="C5A059"/>
+                </a:solidFill>
+              </a:rPr>
+              <a:t>●  </a:t>
+            </a:r>
+            <a:r>
+              <a:rPr sz="2000" b="1">
+                <a:solidFill>
+                  <a:srgbClr val="003B70"/>
+                </a:solidFill>
+              </a:rPr>
               <a:t>Sodium ≈ normal</a:t>
             </a:r>
           </a:p>
           <a:p>
             <a:pPr>
-              <a:defRPr sz="1800"/>
+              <a:spcAft>
+                <a:spcPts val="1000"/>
+              </a:spcAft>
             </a:pPr>
             <a:r>
+              <a:rPr sz="2000">
+                <a:solidFill>
+                  <a:srgbClr val="C5A059"/>
+                </a:solidFill>
+              </a:rPr>
+              <a:t>●  </a:t>
+            </a:r>
+            <a:r>
+              <a:rPr sz="2000" b="1">
+                <a:solidFill>
+                  <a:srgbClr val="003B70"/>
+                </a:solidFill>
+              </a:rPr>
               <a:t>BNP right-skewed (fits a gamma)</a:t>
             </a:r>
           </a:p>
           <a:p>
             <a:pPr>
-              <a:defRPr sz="1800"/>
+              <a:spcAft>
+                <a:spcPts val="1000"/>
+              </a:spcAft>
             </a:pPr>
             <a:r>
+              <a:rPr sz="2000">
+                <a:solidFill>
+                  <a:srgbClr val="C5A059"/>
+                </a:solidFill>
+              </a:rPr>
+              <a:t>●  </a:t>
+            </a:r>
+            <a:r>
+              <a:rPr sz="2000" b="1">
+                <a:solidFill>
+                  <a:srgbClr val="003B70"/>
+                </a:solidFill>
+              </a:rPr>
               <a:t>Age roughly uniform (40–90), not normal</a:t>
             </a:r>
           </a:p>
           <a:p>
             <a:pPr>
-              <a:defRPr sz="1800"/>
+              <a:spcAft>
+                <a:spcPts val="1000"/>
+              </a:spcAft>
             </a:pPr>
             <a:r>
+              <a:rPr sz="2000">
+                <a:solidFill>
+                  <a:srgbClr val="C5A059"/>
+                </a:solidFill>
+              </a:rPr>
+              <a:t>●  </a:t>
+            </a:r>
+            <a:r>
+              <a:rPr sz="2000" b="1">
+                <a:solidFill>
+                  <a:srgbClr val="003B70"/>
+                </a:solidFill>
+              </a:rPr>
               <a:t>Verified shape rather than assuming it (Ch 2)</a:t>
+            </a:r>
+          </a:p>
+        </p:txBody>
+      </p:sp>
+      <p:sp>
+        <p:nvSpPr>
+          <p:cNvPr id="8" name="Rectangle 7"/>
+          <p:cNvSpPr/>
+          <p:nvPr/>
+        </p:nvSpPr>
+        <p:spPr>
+          <a:xfrm>
+            <a:off x="502920" y="6419088"/>
+            <a:ext cx="11185855" cy="15240"/>
+          </a:xfrm>
+          <a:prstGeom prst="rect">
+            <a:avLst/>
+          </a:prstGeom>
+          <a:solidFill>
+            <a:srgbClr val="6CACE4"/>
+          </a:solidFill>
+          <a:ln>
+            <a:noFill/>
+          </a:ln>
+          <a:effectLst/>
+        </p:spPr>
+        <p:style>
+          <a:lnRef idx="1">
+            <a:schemeClr val="accent1"/>
+          </a:lnRef>
+          <a:fillRef idx="3">
+            <a:schemeClr val="accent1"/>
+          </a:fillRef>
+          <a:effectRef idx="2">
+            <a:schemeClr val="accent1"/>
+          </a:effectRef>
+          <a:fontRef idx="minor">
+            <a:schemeClr val="lt1"/>
+          </a:fontRef>
+        </p:style>
+        <p:txBody>
+          <a:bodyPr rtlCol="0" anchor="ctr"/>
+          <a:lstStyle/>
+          <a:p>
+            <a:pPr algn="ctr"/>
+          </a:p>
+        </p:txBody>
+      </p:sp>
+      <p:sp>
+        <p:nvSpPr>
+          <p:cNvPr id="9" name="TextBox 8"/>
+          <p:cNvSpPr txBox="1"/>
+          <p:nvPr/>
+        </p:nvSpPr>
+        <p:spPr>
+          <a:xfrm>
+            <a:off x="502920" y="6455664"/>
+            <a:ext cx="8229600" cy="320040"/>
+          </a:xfrm>
+          <a:prstGeom prst="rect">
+            <a:avLst/>
+          </a:prstGeom>
+          <a:noFill/>
+        </p:spPr>
+        <p:txBody>
+          <a:bodyPr wrap="square" anchor="t">
+            <a:spAutoFit/>
+          </a:bodyPr>
+          <a:lstStyle/>
+          <a:p>
+            <a:r>
+              <a:rPr sz="1000">
+                <a:solidFill>
+                  <a:srgbClr val="54585A"/>
+                </a:solidFill>
+              </a:rPr>
+              <a:t>University of San Diego · Shiley-Marcos School of Engineering</a:t>
+            </a:r>
+          </a:p>
+        </p:txBody>
+      </p:sp>
+      <p:sp>
+        <p:nvSpPr>
+          <p:cNvPr id="10" name="TextBox 9"/>
+          <p:cNvSpPr txBox="1"/>
+          <p:nvPr/>
+        </p:nvSpPr>
+        <p:spPr>
+          <a:xfrm>
+            <a:off x="10911535" y="6455664"/>
+            <a:ext cx="777240" cy="320040"/>
+          </a:xfrm>
+          <a:prstGeom prst="rect">
+            <a:avLst/>
+          </a:prstGeom>
+          <a:noFill/>
+        </p:spPr>
+        <p:txBody>
+          <a:bodyPr wrap="square" anchor="t">
+            <a:spAutoFit/>
+          </a:bodyPr>
+          <a:lstStyle/>
+          <a:p>
+            <a:pPr algn="r"/>
+            <a:r>
+              <a:rPr sz="1100" b="1">
+                <a:solidFill>
+                  <a:srgbClr val="003B70"/>
+                </a:solidFill>
+              </a:rPr>
+              <a:t>4</a:t>
             </a:r>
           </a:p>
         </p:txBody>
@@ -4115,6 +7427,14 @@
 <file path=ppt/slides/slide6.xml><?xml version="1.0" encoding="utf-8"?>
 <p:sld xmlns:a="http://schemas.openxmlformats.org/drawingml/2006/main" xmlns:p="http://schemas.openxmlformats.org/presentationml/2006/main" xmlns:r="http://schemas.openxmlformats.org/officeDocument/2006/relationships">
   <p:cSld>
+    <p:bg>
+      <p:bgPr>
+        <a:solidFill>
+          <a:srgbClr val="FFFFFF"/>
+        </a:solidFill>
+        <a:effectLst/>
+      </p:bgPr>
+    </p:bg>
     <p:spTree>
       <p:nvGrpSpPr>
         <p:cNvPr id="1" name=""/>
@@ -4124,20 +7444,164 @@
       <p:grpSpPr/>
       <p:sp>
         <p:nvSpPr>
-          <p:cNvPr id="2" name="Title 1"/>
-          <p:cNvSpPr>
-            <a:spLocks noGrp="1"/>
-          </p:cNvSpPr>
-          <p:nvPr>
-            <p:ph type="title"/>
-          </p:nvPr>
-        </p:nvSpPr>
-        <p:spPr/>
-        <p:txBody>
-          <a:bodyPr/>
-          <a:lstStyle/>
-          <a:p>
-            <a:r>
+          <p:cNvPr id="2" name="Rectangle 1"/>
+          <p:cNvSpPr/>
+          <p:nvPr/>
+        </p:nvSpPr>
+        <p:spPr>
+          <a:xfrm>
+            <a:off x="0" y="0"/>
+            <a:ext cx="12191695" cy="1051560"/>
+          </a:xfrm>
+          <a:prstGeom prst="rect">
+            <a:avLst/>
+          </a:prstGeom>
+          <a:solidFill>
+            <a:srgbClr val="003B70"/>
+          </a:solidFill>
+          <a:ln>
+            <a:noFill/>
+          </a:ln>
+          <a:effectLst/>
+        </p:spPr>
+        <p:style>
+          <a:lnRef idx="1">
+            <a:schemeClr val="accent1"/>
+          </a:lnRef>
+          <a:fillRef idx="3">
+            <a:schemeClr val="accent1"/>
+          </a:fillRef>
+          <a:effectRef idx="2">
+            <a:schemeClr val="accent1"/>
+          </a:effectRef>
+          <a:fontRef idx="minor">
+            <a:schemeClr val="lt1"/>
+          </a:fontRef>
+        </p:style>
+        <p:txBody>
+          <a:bodyPr rtlCol="0" anchor="ctr"/>
+          <a:lstStyle/>
+          <a:p>
+            <a:pPr algn="ctr"/>
+          </a:p>
+        </p:txBody>
+      </p:sp>
+      <p:sp>
+        <p:nvSpPr>
+          <p:cNvPr id="3" name="Rectangle 2"/>
+          <p:cNvSpPr/>
+          <p:nvPr/>
+        </p:nvSpPr>
+        <p:spPr>
+          <a:xfrm>
+            <a:off x="0" y="1051560"/>
+            <a:ext cx="2926080" cy="82296"/>
+          </a:xfrm>
+          <a:prstGeom prst="rect">
+            <a:avLst/>
+          </a:prstGeom>
+          <a:solidFill>
+            <a:srgbClr val="C5A059"/>
+          </a:solidFill>
+          <a:ln>
+            <a:noFill/>
+          </a:ln>
+          <a:effectLst/>
+        </p:spPr>
+        <p:style>
+          <a:lnRef idx="1">
+            <a:schemeClr val="accent1"/>
+          </a:lnRef>
+          <a:fillRef idx="3">
+            <a:schemeClr val="accent1"/>
+          </a:fillRef>
+          <a:effectRef idx="2">
+            <a:schemeClr val="accent1"/>
+          </a:effectRef>
+          <a:fontRef idx="minor">
+            <a:schemeClr val="lt1"/>
+          </a:fontRef>
+        </p:style>
+        <p:txBody>
+          <a:bodyPr rtlCol="0" anchor="ctr"/>
+          <a:lstStyle/>
+          <a:p>
+            <a:pPr algn="ctr"/>
+          </a:p>
+        </p:txBody>
+      </p:sp>
+      <p:sp>
+        <p:nvSpPr>
+          <p:cNvPr id="4" name="Rectangle 3"/>
+          <p:cNvSpPr/>
+          <p:nvPr/>
+        </p:nvSpPr>
+        <p:spPr>
+          <a:xfrm>
+            <a:off x="2926080" y="1051560"/>
+            <a:ext cx="9265615" cy="82296"/>
+          </a:xfrm>
+          <a:prstGeom prst="rect">
+            <a:avLst/>
+          </a:prstGeom>
+          <a:solidFill>
+            <a:srgbClr val="6CACE4"/>
+          </a:solidFill>
+          <a:ln>
+            <a:noFill/>
+          </a:ln>
+          <a:effectLst/>
+        </p:spPr>
+        <p:style>
+          <a:lnRef idx="1">
+            <a:schemeClr val="accent1"/>
+          </a:lnRef>
+          <a:fillRef idx="3">
+            <a:schemeClr val="accent1"/>
+          </a:fillRef>
+          <a:effectRef idx="2">
+            <a:schemeClr val="accent1"/>
+          </a:effectRef>
+          <a:fontRef idx="minor">
+            <a:schemeClr val="lt1"/>
+          </a:fontRef>
+        </p:style>
+        <p:txBody>
+          <a:bodyPr rtlCol="0" anchor="ctr"/>
+          <a:lstStyle/>
+          <a:p>
+            <a:pPr algn="ctr"/>
+          </a:p>
+        </p:txBody>
+      </p:sp>
+      <p:sp>
+        <p:nvSpPr>
+          <p:cNvPr id="5" name="TextBox 4"/>
+          <p:cNvSpPr txBox="1"/>
+          <p:nvPr/>
+        </p:nvSpPr>
+        <p:spPr>
+          <a:xfrm>
+            <a:off x="502920" y="0"/>
+            <a:ext cx="11185855" cy="1051560"/>
+          </a:xfrm>
+          <a:prstGeom prst="rect">
+            <a:avLst/>
+          </a:prstGeom>
+          <a:noFill/>
+        </p:spPr>
+        <p:txBody>
+          <a:bodyPr wrap="square" anchor="ctr">
+            <a:spAutoFit/>
+          </a:bodyPr>
+          <a:lstStyle/>
+          <a:p>
+            <a:r>
+              <a:rPr sz="2800" b="1">
+                <a:solidFill>
+                  <a:srgbClr val="FFFFFF"/>
+                </a:solidFill>
+              </a:rPr>
               <a:t>EDA — Correlations</a:t>
             </a:r>
           </a:p>
@@ -4145,7 +7609,7 @@
       </p:sp>
       <p:pic>
         <p:nvPicPr>
-          <p:cNvPr id="3" name="Picture 2" descr="fig_corr_heatmap.png"/>
+          <p:cNvPr id="6" name="Picture 5" descr="fig_corr_heatmap.png"/>
           <p:cNvPicPr>
             <a:picLocks noChangeAspect="1"/>
           </p:cNvPicPr>
@@ -4159,8 +7623,8 @@
         </p:blipFill>
         <p:spPr>
           <a:xfrm>
-            <a:off x="365760" y="1280160"/>
-            <a:ext cx="5753717" cy="5120640"/>
+            <a:off x="457200" y="1554480"/>
+            <a:ext cx="5137247" cy="4572000"/>
           </a:xfrm>
           <a:prstGeom prst="rect">
             <a:avLst/>
@@ -4169,14 +7633,14 @@
       </p:pic>
       <p:sp>
         <p:nvSpPr>
-          <p:cNvPr id="4" name="TextBox 3"/>
+          <p:cNvPr id="7" name="TextBox 6"/>
           <p:cNvSpPr txBox="1"/>
           <p:nvPr/>
         </p:nvSpPr>
         <p:spPr>
           <a:xfrm>
-            <a:off x="7498079" y="1463040"/>
-            <a:ext cx="4389120" cy="4754880"/>
+            <a:off x="7955279" y="1737360"/>
+            <a:ext cx="3931920" cy="4389120"/>
           </a:xfrm>
           <a:prstGeom prst="rect">
             <a:avLst/>
@@ -4184,32 +7648,188 @@
           <a:noFill/>
         </p:spPr>
         <p:txBody>
-          <a:bodyPr wrap="square">
+          <a:bodyPr wrap="square" anchor="t">
             <a:spAutoFit/>
           </a:bodyPr>
           <a:lstStyle/>
           <a:p>
             <a:pPr>
-              <a:defRPr sz="1800"/>
+              <a:spcAft>
+                <a:spcPts val="1000"/>
+              </a:spcAft>
             </a:pPr>
             <a:r>
+              <a:rPr sz="2000">
+                <a:solidFill>
+                  <a:srgbClr val="C5A059"/>
+                </a:solidFill>
+              </a:rPr>
+              <a:t>●  </a:t>
+            </a:r>
+            <a:r>
+              <a:rPr sz="2000" b="1">
+                <a:solidFill>
+                  <a:srgbClr val="003B70"/>
+                </a:solidFill>
+              </a:rPr>
               <a:t>All pairwise |r| &lt; 0.05</a:t>
             </a:r>
           </a:p>
           <a:p>
             <a:pPr>
-              <a:defRPr sz="1800"/>
+              <a:spcAft>
+                <a:spcPts val="1000"/>
+              </a:spcAft>
             </a:pPr>
             <a:r>
-              <a:t>Numeric predictors are largely independent</a:t>
+              <a:rPr sz="2000">
+                <a:solidFill>
+                  <a:srgbClr val="C5A059"/>
+                </a:solidFill>
+              </a:rPr>
+              <a:t>●  </a:t>
+            </a:r>
+            <a:r>
+              <a:rPr sz="2000" b="1">
+                <a:solidFill>
+                  <a:srgbClr val="003B70"/>
+                </a:solidFill>
+              </a:rPr>
+              <a:t>Numeric predictors largely independent</a:t>
             </a:r>
           </a:p>
           <a:p>
             <a:pPr>
-              <a:defRPr sz="1800"/>
+              <a:spcAft>
+                <a:spcPts val="1000"/>
+              </a:spcAft>
             </a:pPr>
             <a:r>
-              <a:t>No multicollinearity concerns for the model</a:t>
+              <a:rPr sz="2000">
+                <a:solidFill>
+                  <a:srgbClr val="C5A059"/>
+                </a:solidFill>
+              </a:rPr>
+              <a:t>●  </a:t>
+            </a:r>
+            <a:r>
+              <a:rPr sz="2000" b="1">
+                <a:solidFill>
+                  <a:srgbClr val="003B70"/>
+                </a:solidFill>
+              </a:rPr>
+              <a:t>No multicollinearity concerns</a:t>
+            </a:r>
+          </a:p>
+        </p:txBody>
+      </p:sp>
+      <p:sp>
+        <p:nvSpPr>
+          <p:cNvPr id="8" name="Rectangle 7"/>
+          <p:cNvSpPr/>
+          <p:nvPr/>
+        </p:nvSpPr>
+        <p:spPr>
+          <a:xfrm>
+            <a:off x="502920" y="6419088"/>
+            <a:ext cx="11185855" cy="15240"/>
+          </a:xfrm>
+          <a:prstGeom prst="rect">
+            <a:avLst/>
+          </a:prstGeom>
+          <a:solidFill>
+            <a:srgbClr val="6CACE4"/>
+          </a:solidFill>
+          <a:ln>
+            <a:noFill/>
+          </a:ln>
+          <a:effectLst/>
+        </p:spPr>
+        <p:style>
+          <a:lnRef idx="1">
+            <a:schemeClr val="accent1"/>
+          </a:lnRef>
+          <a:fillRef idx="3">
+            <a:schemeClr val="accent1"/>
+          </a:fillRef>
+          <a:effectRef idx="2">
+            <a:schemeClr val="accent1"/>
+          </a:effectRef>
+          <a:fontRef idx="minor">
+            <a:schemeClr val="lt1"/>
+          </a:fontRef>
+        </p:style>
+        <p:txBody>
+          <a:bodyPr rtlCol="0" anchor="ctr"/>
+          <a:lstStyle/>
+          <a:p>
+            <a:pPr algn="ctr"/>
+          </a:p>
+        </p:txBody>
+      </p:sp>
+      <p:sp>
+        <p:nvSpPr>
+          <p:cNvPr id="9" name="TextBox 8"/>
+          <p:cNvSpPr txBox="1"/>
+          <p:nvPr/>
+        </p:nvSpPr>
+        <p:spPr>
+          <a:xfrm>
+            <a:off x="502920" y="6455664"/>
+            <a:ext cx="8229600" cy="320040"/>
+          </a:xfrm>
+          <a:prstGeom prst="rect">
+            <a:avLst/>
+          </a:prstGeom>
+          <a:noFill/>
+        </p:spPr>
+        <p:txBody>
+          <a:bodyPr wrap="square" anchor="t">
+            <a:spAutoFit/>
+          </a:bodyPr>
+          <a:lstStyle/>
+          <a:p>
+            <a:r>
+              <a:rPr sz="1000">
+                <a:solidFill>
+                  <a:srgbClr val="54585A"/>
+                </a:solidFill>
+              </a:rPr>
+              <a:t>University of San Diego · Shiley-Marcos School of Engineering</a:t>
+            </a:r>
+          </a:p>
+        </p:txBody>
+      </p:sp>
+      <p:sp>
+        <p:nvSpPr>
+          <p:cNvPr id="10" name="TextBox 9"/>
+          <p:cNvSpPr txBox="1"/>
+          <p:nvPr/>
+        </p:nvSpPr>
+        <p:spPr>
+          <a:xfrm>
+            <a:off x="10911535" y="6455664"/>
+            <a:ext cx="777240" cy="320040"/>
+          </a:xfrm>
+          <a:prstGeom prst="rect">
+            <a:avLst/>
+          </a:prstGeom>
+          <a:noFill/>
+        </p:spPr>
+        <p:txBody>
+          <a:bodyPr wrap="square" anchor="t">
+            <a:spAutoFit/>
+          </a:bodyPr>
+          <a:lstStyle/>
+          <a:p>
+            <a:pPr algn="r"/>
+            <a:r>
+              <a:rPr sz="1100" b="1">
+                <a:solidFill>
+                  <a:srgbClr val="003B70"/>
+                </a:solidFill>
+              </a:rPr>
+              <a:t>5</a:t>
             </a:r>
           </a:p>
         </p:txBody>
@@ -4225,6 +7845,14 @@
 <file path=ppt/slides/slide7.xml><?xml version="1.0" encoding="utf-8"?>
 <p:sld xmlns:a="http://schemas.openxmlformats.org/drawingml/2006/main" xmlns:p="http://schemas.openxmlformats.org/presentationml/2006/main" xmlns:r="http://schemas.openxmlformats.org/officeDocument/2006/relationships">
   <p:cSld>
+    <p:bg>
+      <p:bgPr>
+        <a:solidFill>
+          <a:srgbClr val="FFFFFF"/>
+        </a:solidFill>
+        <a:effectLst/>
+      </p:bgPr>
+    </p:bg>
     <p:spTree>
       <p:nvGrpSpPr>
         <p:cNvPr id="1" name=""/>
@@ -4234,20 +7862,164 @@
       <p:grpSpPr/>
       <p:sp>
         <p:nvSpPr>
-          <p:cNvPr id="2" name="Title 1"/>
-          <p:cNvSpPr>
-            <a:spLocks noGrp="1"/>
-          </p:cNvSpPr>
-          <p:nvPr>
-            <p:ph type="title"/>
-          </p:nvPr>
-        </p:nvSpPr>
-        <p:spPr/>
-        <p:txBody>
-          <a:bodyPr/>
-          <a:lstStyle/>
-          <a:p>
-            <a:r>
+          <p:cNvPr id="2" name="Rectangle 1"/>
+          <p:cNvSpPr/>
+          <p:nvPr/>
+        </p:nvSpPr>
+        <p:spPr>
+          <a:xfrm>
+            <a:off x="0" y="0"/>
+            <a:ext cx="12191695" cy="1051560"/>
+          </a:xfrm>
+          <a:prstGeom prst="rect">
+            <a:avLst/>
+          </a:prstGeom>
+          <a:solidFill>
+            <a:srgbClr val="003B70"/>
+          </a:solidFill>
+          <a:ln>
+            <a:noFill/>
+          </a:ln>
+          <a:effectLst/>
+        </p:spPr>
+        <p:style>
+          <a:lnRef idx="1">
+            <a:schemeClr val="accent1"/>
+          </a:lnRef>
+          <a:fillRef idx="3">
+            <a:schemeClr val="accent1"/>
+          </a:fillRef>
+          <a:effectRef idx="2">
+            <a:schemeClr val="accent1"/>
+          </a:effectRef>
+          <a:fontRef idx="minor">
+            <a:schemeClr val="lt1"/>
+          </a:fontRef>
+        </p:style>
+        <p:txBody>
+          <a:bodyPr rtlCol="0" anchor="ctr"/>
+          <a:lstStyle/>
+          <a:p>
+            <a:pPr algn="ctr"/>
+          </a:p>
+        </p:txBody>
+      </p:sp>
+      <p:sp>
+        <p:nvSpPr>
+          <p:cNvPr id="3" name="Rectangle 2"/>
+          <p:cNvSpPr/>
+          <p:nvPr/>
+        </p:nvSpPr>
+        <p:spPr>
+          <a:xfrm>
+            <a:off x="0" y="1051560"/>
+            <a:ext cx="2926080" cy="82296"/>
+          </a:xfrm>
+          <a:prstGeom prst="rect">
+            <a:avLst/>
+          </a:prstGeom>
+          <a:solidFill>
+            <a:srgbClr val="C5A059"/>
+          </a:solidFill>
+          <a:ln>
+            <a:noFill/>
+          </a:ln>
+          <a:effectLst/>
+        </p:spPr>
+        <p:style>
+          <a:lnRef idx="1">
+            <a:schemeClr val="accent1"/>
+          </a:lnRef>
+          <a:fillRef idx="3">
+            <a:schemeClr val="accent1"/>
+          </a:fillRef>
+          <a:effectRef idx="2">
+            <a:schemeClr val="accent1"/>
+          </a:effectRef>
+          <a:fontRef idx="minor">
+            <a:schemeClr val="lt1"/>
+          </a:fontRef>
+        </p:style>
+        <p:txBody>
+          <a:bodyPr rtlCol="0" anchor="ctr"/>
+          <a:lstStyle/>
+          <a:p>
+            <a:pPr algn="ctr"/>
+          </a:p>
+        </p:txBody>
+      </p:sp>
+      <p:sp>
+        <p:nvSpPr>
+          <p:cNvPr id="4" name="Rectangle 3"/>
+          <p:cNvSpPr/>
+          <p:nvPr/>
+        </p:nvSpPr>
+        <p:spPr>
+          <a:xfrm>
+            <a:off x="2926080" y="1051560"/>
+            <a:ext cx="9265615" cy="82296"/>
+          </a:xfrm>
+          <a:prstGeom prst="rect">
+            <a:avLst/>
+          </a:prstGeom>
+          <a:solidFill>
+            <a:srgbClr val="6CACE4"/>
+          </a:solidFill>
+          <a:ln>
+            <a:noFill/>
+          </a:ln>
+          <a:effectLst/>
+        </p:spPr>
+        <p:style>
+          <a:lnRef idx="1">
+            <a:schemeClr val="accent1"/>
+          </a:lnRef>
+          <a:fillRef idx="3">
+            <a:schemeClr val="accent1"/>
+          </a:fillRef>
+          <a:effectRef idx="2">
+            <a:schemeClr val="accent1"/>
+          </a:effectRef>
+          <a:fontRef idx="minor">
+            <a:schemeClr val="lt1"/>
+          </a:fontRef>
+        </p:style>
+        <p:txBody>
+          <a:bodyPr rtlCol="0" anchor="ctr"/>
+          <a:lstStyle/>
+          <a:p>
+            <a:pPr algn="ctr"/>
+          </a:p>
+        </p:txBody>
+      </p:sp>
+      <p:sp>
+        <p:nvSpPr>
+          <p:cNvPr id="5" name="TextBox 4"/>
+          <p:cNvSpPr txBox="1"/>
+          <p:nvPr/>
+        </p:nvSpPr>
+        <p:spPr>
+          <a:xfrm>
+            <a:off x="502920" y="0"/>
+            <a:ext cx="11185855" cy="1051560"/>
+          </a:xfrm>
+          <a:prstGeom prst="rect">
+            <a:avLst/>
+          </a:prstGeom>
+          <a:noFill/>
+        </p:spPr>
+        <p:txBody>
+          <a:bodyPr wrap="square" anchor="ctr">
+            <a:spAutoFit/>
+          </a:bodyPr>
+          <a:lstStyle/>
+          <a:p>
+            <a:r>
+              <a:rPr sz="2800" b="1">
+                <a:solidFill>
+                  <a:srgbClr val="FFFFFF"/>
+                </a:solidFill>
+              </a:rPr>
               <a:t>What Separates the Two Groups?</a:t>
             </a:r>
           </a:p>
@@ -4255,7 +8027,7 @@
       </p:sp>
       <p:pic>
         <p:nvPicPr>
-          <p:cNvPr id="3" name="Picture 2" descr="fig_box_by_target.png"/>
+          <p:cNvPr id="6" name="Picture 5" descr="fig_box_by_target.png"/>
           <p:cNvPicPr>
             <a:picLocks noChangeAspect="1"/>
           </p:cNvPicPr>
@@ -4269,8 +8041,8 @@
         </p:blipFill>
         <p:spPr>
           <a:xfrm>
-            <a:off x="365760" y="1280160"/>
-            <a:ext cx="7027555" cy="5120640"/>
+            <a:off x="457200" y="1554480"/>
+            <a:ext cx="6274603" cy="4572000"/>
           </a:xfrm>
           <a:prstGeom prst="rect">
             <a:avLst/>
@@ -4279,14 +8051,14 @@
       </p:pic>
       <p:sp>
         <p:nvSpPr>
-          <p:cNvPr id="4" name="TextBox 3"/>
+          <p:cNvPr id="7" name="TextBox 6"/>
           <p:cNvSpPr txBox="1"/>
           <p:nvPr/>
         </p:nvSpPr>
         <p:spPr>
           <a:xfrm>
-            <a:off x="7498079" y="1463040"/>
-            <a:ext cx="4389120" cy="4754880"/>
+            <a:off x="7955279" y="1737360"/>
+            <a:ext cx="3931920" cy="4389120"/>
           </a:xfrm>
           <a:prstGeom prst="rect">
             <a:avLst/>
@@ -4294,32 +8066,188 @@
           <a:noFill/>
         </p:spPr>
         <p:txBody>
-          <a:bodyPr wrap="square">
+          <a:bodyPr wrap="square" anchor="t">
             <a:spAutoFit/>
           </a:bodyPr>
           <a:lstStyle/>
           <a:p>
             <a:pPr>
-              <a:defRPr sz="1800"/>
+              <a:spcAft>
+                <a:spcPts val="1000"/>
+              </a:spcAft>
             </a:pPr>
             <a:r>
+              <a:rPr sz="2000">
+                <a:solidFill>
+                  <a:srgbClr val="C5A059"/>
+                </a:solidFill>
+              </a:rPr>
+              <a:t>●  </a:t>
+            </a:r>
+            <a:r>
+              <a:rPr sz="2000" b="1">
+                <a:solidFill>
+                  <a:srgbClr val="003B70"/>
+                </a:solidFill>
+              </a:rPr>
               <a:t>Lower adherence → more readmission</a:t>
             </a:r>
           </a:p>
           <a:p>
             <a:pPr>
-              <a:defRPr sz="1800"/>
+              <a:spcAft>
+                <a:spcPts val="1000"/>
+              </a:spcAft>
             </a:pPr>
             <a:r>
+              <a:rPr sz="2000">
+                <a:solidFill>
+                  <a:srgbClr val="C5A059"/>
+                </a:solidFill>
+              </a:rPr>
+              <a:t>●  </a:t>
+            </a:r>
+            <a:r>
+              <a:rPr sz="2000" b="1">
+                <a:solidFill>
+                  <a:srgbClr val="003B70"/>
+                </a:solidFill>
+              </a:rPr>
               <a:t>Higher BNP and age → more readmission</a:t>
             </a:r>
           </a:p>
           <a:p>
             <a:pPr>
-              <a:defRPr sz="1800"/>
+              <a:spcAft>
+                <a:spcPts val="1000"/>
+              </a:spcAft>
             </a:pPr>
             <a:r>
+              <a:rPr sz="2000">
+                <a:solidFill>
+                  <a:srgbClr val="C5A059"/>
+                </a:solidFill>
+              </a:rPr>
+              <a:t>●  </a:t>
+            </a:r>
+            <a:r>
+              <a:rPr sz="2000" b="1">
+                <a:solidFill>
+                  <a:srgbClr val="003B70"/>
+                </a:solidFill>
+              </a:rPr>
               <a:t>Most other features overlap heavily</a:t>
+            </a:r>
+          </a:p>
+        </p:txBody>
+      </p:sp>
+      <p:sp>
+        <p:nvSpPr>
+          <p:cNvPr id="8" name="Rectangle 7"/>
+          <p:cNvSpPr/>
+          <p:nvPr/>
+        </p:nvSpPr>
+        <p:spPr>
+          <a:xfrm>
+            <a:off x="502920" y="6419088"/>
+            <a:ext cx="11185855" cy="15240"/>
+          </a:xfrm>
+          <a:prstGeom prst="rect">
+            <a:avLst/>
+          </a:prstGeom>
+          <a:solidFill>
+            <a:srgbClr val="6CACE4"/>
+          </a:solidFill>
+          <a:ln>
+            <a:noFill/>
+          </a:ln>
+          <a:effectLst/>
+        </p:spPr>
+        <p:style>
+          <a:lnRef idx="1">
+            <a:schemeClr val="accent1"/>
+          </a:lnRef>
+          <a:fillRef idx="3">
+            <a:schemeClr val="accent1"/>
+          </a:fillRef>
+          <a:effectRef idx="2">
+            <a:schemeClr val="accent1"/>
+          </a:effectRef>
+          <a:fontRef idx="minor">
+            <a:schemeClr val="lt1"/>
+          </a:fontRef>
+        </p:style>
+        <p:txBody>
+          <a:bodyPr rtlCol="0" anchor="ctr"/>
+          <a:lstStyle/>
+          <a:p>
+            <a:pPr algn="ctr"/>
+          </a:p>
+        </p:txBody>
+      </p:sp>
+      <p:sp>
+        <p:nvSpPr>
+          <p:cNvPr id="9" name="TextBox 8"/>
+          <p:cNvSpPr txBox="1"/>
+          <p:nvPr/>
+        </p:nvSpPr>
+        <p:spPr>
+          <a:xfrm>
+            <a:off x="502920" y="6455664"/>
+            <a:ext cx="8229600" cy="320040"/>
+          </a:xfrm>
+          <a:prstGeom prst="rect">
+            <a:avLst/>
+          </a:prstGeom>
+          <a:noFill/>
+        </p:spPr>
+        <p:txBody>
+          <a:bodyPr wrap="square" anchor="t">
+            <a:spAutoFit/>
+          </a:bodyPr>
+          <a:lstStyle/>
+          <a:p>
+            <a:r>
+              <a:rPr sz="1000">
+                <a:solidFill>
+                  <a:srgbClr val="54585A"/>
+                </a:solidFill>
+              </a:rPr>
+              <a:t>University of San Diego · Shiley-Marcos School of Engineering</a:t>
+            </a:r>
+          </a:p>
+        </p:txBody>
+      </p:sp>
+      <p:sp>
+        <p:nvSpPr>
+          <p:cNvPr id="10" name="TextBox 9"/>
+          <p:cNvSpPr txBox="1"/>
+          <p:nvPr/>
+        </p:nvSpPr>
+        <p:spPr>
+          <a:xfrm>
+            <a:off x="10911535" y="6455664"/>
+            <a:ext cx="777240" cy="320040"/>
+          </a:xfrm>
+          <a:prstGeom prst="rect">
+            <a:avLst/>
+          </a:prstGeom>
+          <a:noFill/>
+        </p:spPr>
+        <p:txBody>
+          <a:bodyPr wrap="square" anchor="t">
+            <a:spAutoFit/>
+          </a:bodyPr>
+          <a:lstStyle/>
+          <a:p>
+            <a:pPr algn="r"/>
+            <a:r>
+              <a:rPr sz="1100" b="1">
+                <a:solidFill>
+                  <a:srgbClr val="003B70"/>
+                </a:solidFill>
+              </a:rPr>
+              <a:t>6</a:t>
             </a:r>
           </a:p>
         </p:txBody>
@@ -4335,6 +8263,14 @@
 <file path=ppt/slides/slide8.xml><?xml version="1.0" encoding="utf-8"?>
 <p:sld xmlns:a="http://schemas.openxmlformats.org/drawingml/2006/main" xmlns:p="http://schemas.openxmlformats.org/presentationml/2006/main" xmlns:r="http://schemas.openxmlformats.org/officeDocument/2006/relationships">
   <p:cSld>
+    <p:bg>
+      <p:bgPr>
+        <a:solidFill>
+          <a:srgbClr val="FFFFFF"/>
+        </a:solidFill>
+        <a:effectLst/>
+      </p:bgPr>
+    </p:bg>
     <p:spTree>
       <p:nvGrpSpPr>
         <p:cNvPr id="1" name=""/>
@@ -4344,20 +8280,164 @@
       <p:grpSpPr/>
       <p:sp>
         <p:nvSpPr>
-          <p:cNvPr id="2" name="Title 1"/>
-          <p:cNvSpPr>
-            <a:spLocks noGrp="1"/>
-          </p:cNvSpPr>
-          <p:nvPr>
-            <p:ph type="title"/>
-          </p:nvPr>
-        </p:nvSpPr>
-        <p:spPr/>
-        <p:txBody>
-          <a:bodyPr/>
-          <a:lstStyle/>
-          <a:p>
-            <a:r>
+          <p:cNvPr id="2" name="Rectangle 1"/>
+          <p:cNvSpPr/>
+          <p:nvPr/>
+        </p:nvSpPr>
+        <p:spPr>
+          <a:xfrm>
+            <a:off x="0" y="0"/>
+            <a:ext cx="12191695" cy="1051560"/>
+          </a:xfrm>
+          <a:prstGeom prst="rect">
+            <a:avLst/>
+          </a:prstGeom>
+          <a:solidFill>
+            <a:srgbClr val="003B70"/>
+          </a:solidFill>
+          <a:ln>
+            <a:noFill/>
+          </a:ln>
+          <a:effectLst/>
+        </p:spPr>
+        <p:style>
+          <a:lnRef idx="1">
+            <a:schemeClr val="accent1"/>
+          </a:lnRef>
+          <a:fillRef idx="3">
+            <a:schemeClr val="accent1"/>
+          </a:fillRef>
+          <a:effectRef idx="2">
+            <a:schemeClr val="accent1"/>
+          </a:effectRef>
+          <a:fontRef idx="minor">
+            <a:schemeClr val="lt1"/>
+          </a:fontRef>
+        </p:style>
+        <p:txBody>
+          <a:bodyPr rtlCol="0" anchor="ctr"/>
+          <a:lstStyle/>
+          <a:p>
+            <a:pPr algn="ctr"/>
+          </a:p>
+        </p:txBody>
+      </p:sp>
+      <p:sp>
+        <p:nvSpPr>
+          <p:cNvPr id="3" name="Rectangle 2"/>
+          <p:cNvSpPr/>
+          <p:nvPr/>
+        </p:nvSpPr>
+        <p:spPr>
+          <a:xfrm>
+            <a:off x="0" y="1051560"/>
+            <a:ext cx="2926080" cy="82296"/>
+          </a:xfrm>
+          <a:prstGeom prst="rect">
+            <a:avLst/>
+          </a:prstGeom>
+          <a:solidFill>
+            <a:srgbClr val="C5A059"/>
+          </a:solidFill>
+          <a:ln>
+            <a:noFill/>
+          </a:ln>
+          <a:effectLst/>
+        </p:spPr>
+        <p:style>
+          <a:lnRef idx="1">
+            <a:schemeClr val="accent1"/>
+          </a:lnRef>
+          <a:fillRef idx="3">
+            <a:schemeClr val="accent1"/>
+          </a:fillRef>
+          <a:effectRef idx="2">
+            <a:schemeClr val="accent1"/>
+          </a:effectRef>
+          <a:fontRef idx="minor">
+            <a:schemeClr val="lt1"/>
+          </a:fontRef>
+        </p:style>
+        <p:txBody>
+          <a:bodyPr rtlCol="0" anchor="ctr"/>
+          <a:lstStyle/>
+          <a:p>
+            <a:pPr algn="ctr"/>
+          </a:p>
+        </p:txBody>
+      </p:sp>
+      <p:sp>
+        <p:nvSpPr>
+          <p:cNvPr id="4" name="Rectangle 3"/>
+          <p:cNvSpPr/>
+          <p:nvPr/>
+        </p:nvSpPr>
+        <p:spPr>
+          <a:xfrm>
+            <a:off x="2926080" y="1051560"/>
+            <a:ext cx="9265615" cy="82296"/>
+          </a:xfrm>
+          <a:prstGeom prst="rect">
+            <a:avLst/>
+          </a:prstGeom>
+          <a:solidFill>
+            <a:srgbClr val="6CACE4"/>
+          </a:solidFill>
+          <a:ln>
+            <a:noFill/>
+          </a:ln>
+          <a:effectLst/>
+        </p:spPr>
+        <p:style>
+          <a:lnRef idx="1">
+            <a:schemeClr val="accent1"/>
+          </a:lnRef>
+          <a:fillRef idx="3">
+            <a:schemeClr val="accent1"/>
+          </a:fillRef>
+          <a:effectRef idx="2">
+            <a:schemeClr val="accent1"/>
+          </a:effectRef>
+          <a:fontRef idx="minor">
+            <a:schemeClr val="lt1"/>
+          </a:fontRef>
+        </p:style>
+        <p:txBody>
+          <a:bodyPr rtlCol="0" anchor="ctr"/>
+          <a:lstStyle/>
+          <a:p>
+            <a:pPr algn="ctr"/>
+          </a:p>
+        </p:txBody>
+      </p:sp>
+      <p:sp>
+        <p:nvSpPr>
+          <p:cNvPr id="5" name="TextBox 4"/>
+          <p:cNvSpPr txBox="1"/>
+          <p:nvPr/>
+        </p:nvSpPr>
+        <p:spPr>
+          <a:xfrm>
+            <a:off x="502920" y="0"/>
+            <a:ext cx="11185855" cy="1051560"/>
+          </a:xfrm>
+          <a:prstGeom prst="rect">
+            <a:avLst/>
+          </a:prstGeom>
+          <a:noFill/>
+        </p:spPr>
+        <p:txBody>
+          <a:bodyPr wrap="square" anchor="ctr">
+            <a:spAutoFit/>
+          </a:bodyPr>
+          <a:lstStyle/>
+          <a:p>
+            <a:r>
+              <a:rPr sz="2800" b="1">
+                <a:solidFill>
+                  <a:srgbClr val="FFFFFF"/>
+                </a:solidFill>
+              </a:rPr>
               <a:t>Statistical Testing (Ch 5)</a:t>
             </a:r>
           </a:p>
@@ -4365,64 +8445,272 @@
       </p:sp>
       <p:sp>
         <p:nvSpPr>
-          <p:cNvPr id="3" name="Content Placeholder 2"/>
-          <p:cNvSpPr>
-            <a:spLocks noGrp="1"/>
-          </p:cNvSpPr>
-          <p:nvPr>
-            <p:ph idx="1"/>
-          </p:nvPr>
-        </p:nvSpPr>
-        <p:spPr/>
-        <p:txBody>
-          <a:bodyPr/>
+          <p:cNvPr id="6" name="TextBox 5"/>
+          <p:cNvSpPr txBox="1"/>
+          <p:nvPr/>
+        </p:nvSpPr>
+        <p:spPr>
+          <a:xfrm>
+            <a:off x="640080" y="1554480"/>
+            <a:ext cx="10972800" cy="4663440"/>
+          </a:xfrm>
+          <a:prstGeom prst="rect">
+            <a:avLst/>
+          </a:prstGeom>
+          <a:noFill/>
+        </p:spPr>
+        <p:txBody>
+          <a:bodyPr wrap="square" anchor="t">
+            <a:spAutoFit/>
+          </a:bodyPr>
           <a:lstStyle/>
           <a:p>
             <a:pPr>
-              <a:defRPr sz="2200"/>
+              <a:spcAft>
+                <a:spcPts val="1000"/>
+              </a:spcAft>
             </a:pPr>
             <a:r>
+              <a:rPr sz="2000">
+                <a:solidFill>
+                  <a:srgbClr val="C5A059"/>
+                </a:solidFill>
+              </a:rPr>
+              <a:t>●  </a:t>
+            </a:r>
+            <a:r>
+              <a:rPr sz="2000" b="1">
+                <a:solidFill>
+                  <a:srgbClr val="003B70"/>
+                </a:solidFill>
+              </a:rPr>
               <a:t>Chi-square tests (categorical) and Welch's t-tests (numeric) vs. readmission.</a:t>
             </a:r>
           </a:p>
           <a:p>
             <a:pPr>
-              <a:defRPr sz="2200"/>
+              <a:spcAft>
+                <a:spcPts val="1000"/>
+              </a:spcAft>
             </a:pPr>
             <a:r>
+              <a:rPr sz="2000">
+                <a:solidFill>
+                  <a:srgbClr val="C5A059"/>
+                </a:solidFill>
+              </a:rPr>
+              <a:t>●  </a:t>
+            </a:r>
+            <a:r>
+              <a:rPr sz="2000" b="1">
+                <a:solidFill>
+                  <a:srgbClr val="003B70"/>
+                </a:solidFill>
+              </a:rPr>
               <a:t>Bonferroni correction for multiple testing (Ch 6.5).</a:t>
             </a:r>
           </a:p>
           <a:p>
             <a:pPr>
-              <a:defRPr sz="2200"/>
+              <a:spcAft>
+                <a:spcPts val="1000"/>
+              </a:spcAft>
             </a:pPr>
             <a:r>
-              <a:t>Significant predictors:</a:t>
+              <a:rPr sz="2000">
+                <a:solidFill>
+                  <a:srgbClr val="C5A059"/>
+                </a:solidFill>
+              </a:rPr>
+              <a:t>●  </a:t>
+            </a:r>
+            <a:r>
+              <a:rPr sz="2000" b="1">
+                <a:solidFill>
+                  <a:srgbClr val="003B70"/>
+                </a:solidFill>
+              </a:rPr>
+              <a:t>Significant predictors</a:t>
             </a:r>
           </a:p>
           <a:p>
             <a:pPr lvl="1">
-              <a:defRPr sz="1800"/>
+              <a:spcAft>
+                <a:spcPts val="1000"/>
+              </a:spcAft>
             </a:pPr>
             <a:r>
+              <a:rPr sz="1600">
+                <a:solidFill>
+                  <a:srgbClr val="6CACE4"/>
+                </a:solidFill>
+              </a:rPr>
+              <a:t>–  </a:t>
+            </a:r>
+            <a:r>
+              <a:rPr sz="1600" b="0">
+                <a:solidFill>
+                  <a:srgbClr val="54585A"/>
+                </a:solidFill>
+              </a:rPr>
               <a:t>adherence_score, BNP, age, ACE inhibitor, beta blocker, distance to hospital</a:t>
             </a:r>
           </a:p>
           <a:p>
             <a:pPr>
-              <a:defRPr sz="2200"/>
+              <a:spcAft>
+                <a:spcPts val="1000"/>
+              </a:spcAft>
             </a:pPr>
             <a:r>
+              <a:rPr sz="2000">
+                <a:solidFill>
+                  <a:srgbClr val="C5A059"/>
+                </a:solidFill>
+              </a:rPr>
+              <a:t>●  </a:t>
+            </a:r>
+            <a:r>
+              <a:rPr sz="2000" b="1">
+                <a:solidFill>
+                  <a:srgbClr val="003B70"/>
+                </a:solidFill>
+              </a:rPr>
               <a:t>No association: gender, income level, BMI, heart rate, diuretic.</a:t>
             </a:r>
           </a:p>
           <a:p>
             <a:pPr>
-              <a:defRPr sz="2200"/>
+              <a:spcAft>
+                <a:spcPts val="1000"/>
+              </a:spcAft>
             </a:pPr>
             <a:r>
+              <a:rPr sz="2000">
+                <a:solidFill>
+                  <a:srgbClr val="C5A059"/>
+                </a:solidFill>
+              </a:rPr>
+              <a:t>●  </a:t>
+            </a:r>
+            <a:r>
+              <a:rPr sz="2000" b="1">
+                <a:solidFill>
+                  <a:srgbClr val="003B70"/>
+                </a:solidFill>
+              </a:rPr>
               <a:t>Confirmed by a permutation test (p ≈ 0) and high power (~1.0).</a:t>
+            </a:r>
+          </a:p>
+        </p:txBody>
+      </p:sp>
+      <p:sp>
+        <p:nvSpPr>
+          <p:cNvPr id="7" name="Rectangle 6"/>
+          <p:cNvSpPr/>
+          <p:nvPr/>
+        </p:nvSpPr>
+        <p:spPr>
+          <a:xfrm>
+            <a:off x="502920" y="6419088"/>
+            <a:ext cx="11185855" cy="15240"/>
+          </a:xfrm>
+          <a:prstGeom prst="rect">
+            <a:avLst/>
+          </a:prstGeom>
+          <a:solidFill>
+            <a:srgbClr val="6CACE4"/>
+          </a:solidFill>
+          <a:ln>
+            <a:noFill/>
+          </a:ln>
+          <a:effectLst/>
+        </p:spPr>
+        <p:style>
+          <a:lnRef idx="1">
+            <a:schemeClr val="accent1"/>
+          </a:lnRef>
+          <a:fillRef idx="3">
+            <a:schemeClr val="accent1"/>
+          </a:fillRef>
+          <a:effectRef idx="2">
+            <a:schemeClr val="accent1"/>
+          </a:effectRef>
+          <a:fontRef idx="minor">
+            <a:schemeClr val="lt1"/>
+          </a:fontRef>
+        </p:style>
+        <p:txBody>
+          <a:bodyPr rtlCol="0" anchor="ctr"/>
+          <a:lstStyle/>
+          <a:p>
+            <a:pPr algn="ctr"/>
+          </a:p>
+        </p:txBody>
+      </p:sp>
+      <p:sp>
+        <p:nvSpPr>
+          <p:cNvPr id="8" name="TextBox 7"/>
+          <p:cNvSpPr txBox="1"/>
+          <p:nvPr/>
+        </p:nvSpPr>
+        <p:spPr>
+          <a:xfrm>
+            <a:off x="502920" y="6455664"/>
+            <a:ext cx="8229600" cy="320040"/>
+          </a:xfrm>
+          <a:prstGeom prst="rect">
+            <a:avLst/>
+          </a:prstGeom>
+          <a:noFill/>
+        </p:spPr>
+        <p:txBody>
+          <a:bodyPr wrap="square" anchor="t">
+            <a:spAutoFit/>
+          </a:bodyPr>
+          <a:lstStyle/>
+          <a:p>
+            <a:r>
+              <a:rPr sz="1000">
+                <a:solidFill>
+                  <a:srgbClr val="54585A"/>
+                </a:solidFill>
+              </a:rPr>
+              <a:t>University of San Diego · Shiley-Marcos School of Engineering</a:t>
+            </a:r>
+          </a:p>
+        </p:txBody>
+      </p:sp>
+      <p:sp>
+        <p:nvSpPr>
+          <p:cNvPr id="9" name="TextBox 8"/>
+          <p:cNvSpPr txBox="1"/>
+          <p:nvPr/>
+        </p:nvSpPr>
+        <p:spPr>
+          <a:xfrm>
+            <a:off x="10911535" y="6455664"/>
+            <a:ext cx="777240" cy="320040"/>
+          </a:xfrm>
+          <a:prstGeom prst="rect">
+            <a:avLst/>
+          </a:prstGeom>
+          <a:noFill/>
+        </p:spPr>
+        <p:txBody>
+          <a:bodyPr wrap="square" anchor="t">
+            <a:spAutoFit/>
+          </a:bodyPr>
+          <a:lstStyle/>
+          <a:p>
+            <a:pPr algn="r"/>
+            <a:r>
+              <a:rPr sz="1100" b="1">
+                <a:solidFill>
+                  <a:srgbClr val="003B70"/>
+                </a:solidFill>
+              </a:rPr>
+              <a:t>7</a:t>
             </a:r>
           </a:p>
         </p:txBody>
@@ -4438,6 +8726,14 @@
 <file path=ppt/slides/slide9.xml><?xml version="1.0" encoding="utf-8"?>
 <p:sld xmlns:a="http://schemas.openxmlformats.org/drawingml/2006/main" xmlns:p="http://schemas.openxmlformats.org/presentationml/2006/main" xmlns:r="http://schemas.openxmlformats.org/officeDocument/2006/relationships">
   <p:cSld>
+    <p:bg>
+      <p:bgPr>
+        <a:solidFill>
+          <a:srgbClr val="FFFFFF"/>
+        </a:solidFill>
+        <a:effectLst/>
+      </p:bgPr>
+    </p:bg>
     <p:spTree>
       <p:nvGrpSpPr>
         <p:cNvPr id="1" name=""/>
@@ -4447,20 +8743,164 @@
       <p:grpSpPr/>
       <p:sp>
         <p:nvSpPr>
-          <p:cNvPr id="2" name="Title 1"/>
-          <p:cNvSpPr>
-            <a:spLocks noGrp="1"/>
-          </p:cNvSpPr>
-          <p:nvPr>
-            <p:ph type="title"/>
-          </p:nvPr>
-        </p:nvSpPr>
-        <p:spPr/>
-        <p:txBody>
-          <a:bodyPr/>
-          <a:lstStyle/>
-          <a:p>
-            <a:r>
+          <p:cNvPr id="2" name="Rectangle 1"/>
+          <p:cNvSpPr/>
+          <p:nvPr/>
+        </p:nvSpPr>
+        <p:spPr>
+          <a:xfrm>
+            <a:off x="0" y="0"/>
+            <a:ext cx="12191695" cy="1051560"/>
+          </a:xfrm>
+          <a:prstGeom prst="rect">
+            <a:avLst/>
+          </a:prstGeom>
+          <a:solidFill>
+            <a:srgbClr val="003B70"/>
+          </a:solidFill>
+          <a:ln>
+            <a:noFill/>
+          </a:ln>
+          <a:effectLst/>
+        </p:spPr>
+        <p:style>
+          <a:lnRef idx="1">
+            <a:schemeClr val="accent1"/>
+          </a:lnRef>
+          <a:fillRef idx="3">
+            <a:schemeClr val="accent1"/>
+          </a:fillRef>
+          <a:effectRef idx="2">
+            <a:schemeClr val="accent1"/>
+          </a:effectRef>
+          <a:fontRef idx="minor">
+            <a:schemeClr val="lt1"/>
+          </a:fontRef>
+        </p:style>
+        <p:txBody>
+          <a:bodyPr rtlCol="0" anchor="ctr"/>
+          <a:lstStyle/>
+          <a:p>
+            <a:pPr algn="ctr"/>
+          </a:p>
+        </p:txBody>
+      </p:sp>
+      <p:sp>
+        <p:nvSpPr>
+          <p:cNvPr id="3" name="Rectangle 2"/>
+          <p:cNvSpPr/>
+          <p:nvPr/>
+        </p:nvSpPr>
+        <p:spPr>
+          <a:xfrm>
+            <a:off x="0" y="1051560"/>
+            <a:ext cx="2926080" cy="82296"/>
+          </a:xfrm>
+          <a:prstGeom prst="rect">
+            <a:avLst/>
+          </a:prstGeom>
+          <a:solidFill>
+            <a:srgbClr val="C5A059"/>
+          </a:solidFill>
+          <a:ln>
+            <a:noFill/>
+          </a:ln>
+          <a:effectLst/>
+        </p:spPr>
+        <p:style>
+          <a:lnRef idx="1">
+            <a:schemeClr val="accent1"/>
+          </a:lnRef>
+          <a:fillRef idx="3">
+            <a:schemeClr val="accent1"/>
+          </a:fillRef>
+          <a:effectRef idx="2">
+            <a:schemeClr val="accent1"/>
+          </a:effectRef>
+          <a:fontRef idx="minor">
+            <a:schemeClr val="lt1"/>
+          </a:fontRef>
+        </p:style>
+        <p:txBody>
+          <a:bodyPr rtlCol="0" anchor="ctr"/>
+          <a:lstStyle/>
+          <a:p>
+            <a:pPr algn="ctr"/>
+          </a:p>
+        </p:txBody>
+      </p:sp>
+      <p:sp>
+        <p:nvSpPr>
+          <p:cNvPr id="4" name="Rectangle 3"/>
+          <p:cNvSpPr/>
+          <p:nvPr/>
+        </p:nvSpPr>
+        <p:spPr>
+          <a:xfrm>
+            <a:off x="2926080" y="1051560"/>
+            <a:ext cx="9265615" cy="82296"/>
+          </a:xfrm>
+          <a:prstGeom prst="rect">
+            <a:avLst/>
+          </a:prstGeom>
+          <a:solidFill>
+            <a:srgbClr val="6CACE4"/>
+          </a:solidFill>
+          <a:ln>
+            <a:noFill/>
+          </a:ln>
+          <a:effectLst/>
+        </p:spPr>
+        <p:style>
+          <a:lnRef idx="1">
+            <a:schemeClr val="accent1"/>
+          </a:lnRef>
+          <a:fillRef idx="3">
+            <a:schemeClr val="accent1"/>
+          </a:fillRef>
+          <a:effectRef idx="2">
+            <a:schemeClr val="accent1"/>
+          </a:effectRef>
+          <a:fontRef idx="minor">
+            <a:schemeClr val="lt1"/>
+          </a:fontRef>
+        </p:style>
+        <p:txBody>
+          <a:bodyPr rtlCol="0" anchor="ctr"/>
+          <a:lstStyle/>
+          <a:p>
+            <a:pPr algn="ctr"/>
+          </a:p>
+        </p:txBody>
+      </p:sp>
+      <p:sp>
+        <p:nvSpPr>
+          <p:cNvPr id="5" name="TextBox 4"/>
+          <p:cNvSpPr txBox="1"/>
+          <p:nvPr/>
+        </p:nvSpPr>
+        <p:spPr>
+          <a:xfrm>
+            <a:off x="502920" y="0"/>
+            <a:ext cx="11185855" cy="1051560"/>
+          </a:xfrm>
+          <a:prstGeom prst="rect">
+            <a:avLst/>
+          </a:prstGeom>
+          <a:noFill/>
+        </p:spPr>
+        <p:txBody>
+          <a:bodyPr wrap="square" anchor="ctr">
+            <a:spAutoFit/>
+          </a:bodyPr>
+          <a:lstStyle/>
+          <a:p>
+            <a:r>
+              <a:rPr sz="2800" b="1">
+                <a:solidFill>
+                  <a:srgbClr val="FFFFFF"/>
+                </a:solidFill>
+              </a:rPr>
               <a:t>Estimation &amp; Inference (Ch 3–4)</a:t>
             </a:r>
           </a:p>
@@ -4468,7 +8908,7 @@
       </p:sp>
       <p:pic>
         <p:nvPicPr>
-          <p:cNvPr id="3" name="Picture 2" descr="fig_clt_bnp.png"/>
+          <p:cNvPr id="6" name="Picture 5" descr="fig_clt_bnp.png"/>
           <p:cNvPicPr>
             <a:picLocks noChangeAspect="1"/>
           </p:cNvPicPr>
@@ -4482,8 +8922,8 @@
         </p:blipFill>
         <p:spPr>
           <a:xfrm>
-            <a:off x="365760" y="1280160"/>
-            <a:ext cx="7803328" cy="5120640"/>
+            <a:off x="457200" y="1554480"/>
+            <a:ext cx="6967257" cy="4572000"/>
           </a:xfrm>
           <a:prstGeom prst="rect">
             <a:avLst/>
@@ -4492,14 +8932,14 @@
       </p:pic>
       <p:sp>
         <p:nvSpPr>
-          <p:cNvPr id="4" name="TextBox 3"/>
+          <p:cNvPr id="7" name="TextBox 6"/>
           <p:cNvSpPr txBox="1"/>
           <p:nvPr/>
         </p:nvSpPr>
         <p:spPr>
           <a:xfrm>
-            <a:off x="7498079" y="1463040"/>
-            <a:ext cx="4389120" cy="4754880"/>
+            <a:off x="7955279" y="1737360"/>
+            <a:ext cx="3931920" cy="4389120"/>
           </a:xfrm>
           <a:prstGeom prst="rect">
             <a:avLst/>
@@ -4507,32 +8947,211 @@
           <a:noFill/>
         </p:spPr>
         <p:txBody>
-          <a:bodyPr wrap="square">
+          <a:bodyPr wrap="square" anchor="t">
             <a:spAutoFit/>
           </a:bodyPr>
           <a:lstStyle/>
           <a:p>
             <a:pPr>
-              <a:defRPr sz="1800"/>
+              <a:spcAft>
+                <a:spcPts val="1000"/>
+              </a:spcAft>
             </a:pPr>
             <a:r>
-              <a:t>CLT: sample-mean of skewed BNP is normal; SE matches σ/√n</a:t>
+              <a:rPr sz="2000">
+                <a:solidFill>
+                  <a:srgbClr val="C5A059"/>
+                </a:solidFill>
+              </a:rPr>
+              <a:t>●  </a:t>
+            </a:r>
+            <a:r>
+              <a:rPr sz="2000" b="1">
+                <a:solidFill>
+                  <a:srgbClr val="003B70"/>
+                </a:solidFill>
+              </a:rPr>
+              <a:t>CLT: sample-mean of skewed BNP is normal</a:t>
             </a:r>
           </a:p>
           <a:p>
             <a:pPr>
-              <a:defRPr sz="1800"/>
+              <a:spcAft>
+                <a:spcPts val="1000"/>
+              </a:spcAft>
             </a:pPr>
             <a:r>
+              <a:rPr sz="2000">
+                <a:solidFill>
+                  <a:srgbClr val="C5A059"/>
+                </a:solidFill>
+              </a:rPr>
+              <a:t>●  </a:t>
+            </a:r>
+            <a:r>
+              <a:rPr sz="2000" b="1">
+                <a:solidFill>
+                  <a:srgbClr val="003B70"/>
+                </a:solidFill>
+              </a:rPr>
+              <a:t>SE matches σ/√n</a:t>
+            </a:r>
+          </a:p>
+          <a:p>
+            <a:pPr>
+              <a:spcAft>
+                <a:spcPts val="1000"/>
+              </a:spcAft>
+            </a:pPr>
+            <a:r>
+              <a:rPr sz="2000">
+                <a:solidFill>
+                  <a:srgbClr val="C5A059"/>
+                </a:solidFill>
+              </a:rPr>
+              <a:t>●  </a:t>
+            </a:r>
+            <a:r>
+              <a:rPr sz="2000" b="1">
+                <a:solidFill>
+                  <a:srgbClr val="003B70"/>
+                </a:solidFill>
+              </a:rPr>
               <a:t>Readmission rate 41.1%, 95% CI (39.4%, 42.9%)</a:t>
             </a:r>
           </a:p>
           <a:p>
             <a:pPr>
-              <a:defRPr sz="1800"/>
+              <a:spcAft>
+                <a:spcPts val="1000"/>
+              </a:spcAft>
             </a:pPr>
             <a:r>
-              <a:t>Bootstrap, t-based, and Bayesian intervals all agree</a:t>
+              <a:rPr sz="2000">
+                <a:solidFill>
+                  <a:srgbClr val="C5A059"/>
+                </a:solidFill>
+              </a:rPr>
+              <a:t>●  </a:t>
+            </a:r>
+            <a:r>
+              <a:rPr sz="2000" b="1">
+                <a:solidFill>
+                  <a:srgbClr val="003B70"/>
+                </a:solidFill>
+              </a:rPr>
+              <a:t>Bootstrap, t-based &amp; Bayesian intervals agree</a:t>
+            </a:r>
+          </a:p>
+        </p:txBody>
+      </p:sp>
+      <p:sp>
+        <p:nvSpPr>
+          <p:cNvPr id="8" name="Rectangle 7"/>
+          <p:cNvSpPr/>
+          <p:nvPr/>
+        </p:nvSpPr>
+        <p:spPr>
+          <a:xfrm>
+            <a:off x="502920" y="6419088"/>
+            <a:ext cx="11185855" cy="15240"/>
+          </a:xfrm>
+          <a:prstGeom prst="rect">
+            <a:avLst/>
+          </a:prstGeom>
+          <a:solidFill>
+            <a:srgbClr val="6CACE4"/>
+          </a:solidFill>
+          <a:ln>
+            <a:noFill/>
+          </a:ln>
+          <a:effectLst/>
+        </p:spPr>
+        <p:style>
+          <a:lnRef idx="1">
+            <a:schemeClr val="accent1"/>
+          </a:lnRef>
+          <a:fillRef idx="3">
+            <a:schemeClr val="accent1"/>
+          </a:fillRef>
+          <a:effectRef idx="2">
+            <a:schemeClr val="accent1"/>
+          </a:effectRef>
+          <a:fontRef idx="minor">
+            <a:schemeClr val="lt1"/>
+          </a:fontRef>
+        </p:style>
+        <p:txBody>
+          <a:bodyPr rtlCol="0" anchor="ctr"/>
+          <a:lstStyle/>
+          <a:p>
+            <a:pPr algn="ctr"/>
+          </a:p>
+        </p:txBody>
+      </p:sp>
+      <p:sp>
+        <p:nvSpPr>
+          <p:cNvPr id="9" name="TextBox 8"/>
+          <p:cNvSpPr txBox="1"/>
+          <p:nvPr/>
+        </p:nvSpPr>
+        <p:spPr>
+          <a:xfrm>
+            <a:off x="502920" y="6455664"/>
+            <a:ext cx="8229600" cy="320040"/>
+          </a:xfrm>
+          <a:prstGeom prst="rect">
+            <a:avLst/>
+          </a:prstGeom>
+          <a:noFill/>
+        </p:spPr>
+        <p:txBody>
+          <a:bodyPr wrap="square" anchor="t">
+            <a:spAutoFit/>
+          </a:bodyPr>
+          <a:lstStyle/>
+          <a:p>
+            <a:r>
+              <a:rPr sz="1000">
+                <a:solidFill>
+                  <a:srgbClr val="54585A"/>
+                </a:solidFill>
+              </a:rPr>
+              <a:t>University of San Diego · Shiley-Marcos School of Engineering</a:t>
+            </a:r>
+          </a:p>
+        </p:txBody>
+      </p:sp>
+      <p:sp>
+        <p:nvSpPr>
+          <p:cNvPr id="10" name="TextBox 9"/>
+          <p:cNvSpPr txBox="1"/>
+          <p:nvPr/>
+        </p:nvSpPr>
+        <p:spPr>
+          <a:xfrm>
+            <a:off x="10911535" y="6455664"/>
+            <a:ext cx="777240" cy="320040"/>
+          </a:xfrm>
+          <a:prstGeom prst="rect">
+            <a:avLst/>
+          </a:prstGeom>
+          <a:noFill/>
+        </p:spPr>
+        <p:txBody>
+          <a:bodyPr wrap="square" anchor="t">
+            <a:spAutoFit/>
+          </a:bodyPr>
+          <a:lstStyle/>
+          <a:p>
+            <a:pPr algn="r"/>
+            <a:r>
+              <a:rPr sz="1100" b="1">
+                <a:solidFill>
+                  <a:srgbClr val="003B70"/>
+                </a:solidFill>
+              </a:rPr>
+              <a:t>8</a:t>
             </a:r>
           </a:p>
         </p:txBody>
